--- a/presentation/checkpoint2.pptx
+++ b/presentation/checkpoint2.pptx
@@ -117,7 +117,7 @@
   <p:extLst>
     <p:ext uri="{521415D9-36F7-43E2-AB2F-B90AF26B5E84}">
       <p14:sectionLst xmlns:p14="http://schemas.microsoft.com/office/powerpoint/2010/main">
-        <p14:section name="Задача и решение" id="{b6a7ec5d-4c5c-875c-942e-a20dbd4fdf8f}">
+        <p14:section name="Задача и решение" id="{530b4ade-05f2-97be-78f4-0cb911beafaf}">
           <p14:sldIdLst>
             <p14:sldId id="256"/>
             <p14:sldId id="257"/>
@@ -127,7 +127,7 @@
             <p14:sldId id="261"/>
           </p14:sldIdLst>
         </p14:section>
-        <p14:section name="Состояние и результаты" id="{b2979c5b-bf4e-769e-52b8-b1c9ee681364}">
+        <p14:section name="Состояние и результаты" id="{c16c1246-384f-b744-684f-5d54b4b96348}">
           <p14:sldIdLst>
             <p14:sldId id="262"/>
             <p14:sldId id="263"/>
@@ -135,7 +135,7 @@
             <p14:sldId id="265"/>
           </p14:sldIdLst>
         </p14:section>
-        <p14:section name="Как работали" id="{6548c175-0567-f033-1d81-a8f15bac864d}">
+        <p14:section name="Как работали" id="{725cb4bd-dd06-a0bf-b906-9ac2de7c0e57}">
           <p14:sldIdLst>
             <p14:sldId id="266"/>
           </p14:sldIdLst>
@@ -351,8 +351,8 @@
           <c:showBubbleSize val="0"/>
           <c:showLeaderLines val="0"/>
         </c:dLbls>
-        <c:gapWidth val="90"/>
-        <c:overlap val="0"/>
+        <c:gapWidth val="110"/>
+        <c:overlap val="-8"/>
         <c:axId val="2094734554"/>
         <c:axId val="2094734552"/>
         <c:axId val="2094734556"/>
@@ -607,7 +607,7 @@
                     <c:v>Подъём по сигналу</c:v>
                   </c:pt>
                   <c:pt idx="2">
-                    <c:v>Объезд по готовому маршруту</c:v>
+                    <c:v>Фиксированный план</c:v>
                   </c:pt>
                   <c:pt idx="3">
                     <c:v>Спираль</c:v>
@@ -783,7 +783,7 @@
     <c:plotArea>
       <c:layout/>
       <c:barChart>
-        <c:barDir val="col"/>
+        <c:barDir val="bar"/>
         <c:grouping val="clustered"/>
         <c:varyColors val="0"/>
         <c:ser>
@@ -802,7 +802,7 @@
           </c:tx>
           <c:spPr>
             <a:solidFill>
-              <a:srgbClr val="2A78D6"/>
+              <a:srgbClr val="1BAF7A"/>
             </a:solidFill>
             <a:effectLst/>
           </c:spPr>
@@ -837,7 +837,7 @@
             <c:bubble3D val="0"/>
             <c:spPr>
               <a:solidFill>
-                <a:srgbClr val="2A78D6"/>
+                <a:srgbClr val="1BAF7A"/>
               </a:solidFill>
               <a:effectLst/>
             </c:spPr>
@@ -859,7 +859,7 @@
             <c:bubble3D val="0"/>
             <c:spPr>
               <a:solidFill>
-                <a:srgbClr val="1BAF7A"/>
+                <a:srgbClr val="2A78D6"/>
               </a:solidFill>
               <a:effectLst/>
             </c:spPr>
@@ -871,13 +871,13 @@
                 <c:ptCount val="3"/>
                 <c:lvl>
                   <c:pt idx="0">
-                    <c:v>Фиксированный план</c:v>
+                    <c:v>Исследователь</c:v>
                   </c:pt>
                   <c:pt idx="1">
                     <c:v>С адаптацией</c:v>
                   </c:pt>
                   <c:pt idx="2">
-                    <c:v>Исследователь</c:v>
+                    <c:v>Фиксированный план</c:v>
                   </c:pt>
                 </c:lvl>
               </c:multiLvlStrCache>
@@ -890,13 +890,13 @@
                 <c:formatCode>General</c:formatCode>
                 <c:ptCount val="3"/>
                 <c:pt idx="0">
-                  <c:v>82.5</c:v>
+                  <c:v>97.5</c:v>
                 </c:pt>
                 <c:pt idx="1">
                   <c:v>87.5</c:v>
                 </c:pt>
                 <c:pt idx="2">
-                  <c:v>97.5</c:v>
+                  <c:v>82.5</c:v>
                 </c:pt>
               </c:numCache>
             </c:numRef>
@@ -935,14 +935,14 @@
       <c:catAx>
         <c:axId val="2094734554"/>
         <c:scaling>
-          <c:orientation val="minMax"/>
+          <c:orientation val="maxMin"/>
         </c:scaling>
         <c:delete val="0"/>
-        <c:axPos val="b"/>
+        <c:axPos val="l"/>
         <c:numFmt formatCode="General" sourceLinked="1"/>
         <c:majorTickMark val="out"/>
         <c:minorTickMark val="none"/>
-        <c:tickLblPos val="low"/>
+        <c:tickLblPos val="nextTo"/>
         <c:spPr>
           <a:ln w="12700" cap="flat">
             <a:solidFill>
@@ -957,7 +957,7 @@
           <a:lstStyle/>
           <a:p>
             <a:pPr>
-              <a:defRPr sz="1100" b="0" i="0" u="none" strike="noStrike">
+              <a:defRPr sz="1300" b="0" i="0" u="none" strike="noStrike">
                 <a:solidFill>
                   <a:srgbClr val="5B6168"/>
                 </a:solidFill>
@@ -981,11 +981,11 @@
           <c:min val="0"/>
         </c:scaling>
         <c:delete val="1"/>
-        <c:axPos val="l"/>
+        <c:axPos val="b"/>
         <c:numFmt formatCode="General" sourceLinked="0"/>
         <c:majorTickMark val="out"/>
         <c:minorTickMark val="none"/>
-        <c:tickLblPos val="nextTo"/>
+        <c:tickLblPos val="low"/>
         <c:spPr>
           <a:ln w="12700" cap="flat">
             <a:solidFill>
@@ -1057,7 +1057,7 @@
               <c:strCache>
                 <c:ptCount val="1"/>
                 <c:pt idx="0">
-                  <c:v>Только счётчик пути колёс</c:v>
+                  <c:v>Только одометрия</c:v>
                 </c:pt>
               </c:strCache>
             </c:strRef>
@@ -2096,7 +2096,7 @@
           <a:p>
             <a:r>
               <a:rPr lang="en-US" dirty="0"/>
-              <a:t>Серии считаются в быстром симуляторе, поэтому мы проверили перенос в Gazebo с настоящей физикой. Сначала положение по колёсам уходило — до 2,2 метра. Причину нашли: первые тридцать секунд после появления в мире робот покачивается, и манёвры в это время сбивают счёт пути. Теперь агент ждёт и сверяет положение с лидаром: ошибка около двух сантиметров, максимум 4,8. Лёгкий и средний уровни совпали с быстрым симулятором полностью, на трудном собрано 5 образцов против 6.</a:t>
+              <a:t>Серии считаются в быстром симуляторе, поэтому мы проверили перенос в Gazebo с настоящей физикой. Сначала одометрия, то есть счёт пути по колёсам, уходила больше чем на метр. Причину нашли: первые тридцать секунд после появления в мире робот покачивается, и манёвры в это время сбивают одометрию. Теперь агент ждёт и сверяет положение с лидаром: ошибка около двух сантиметров, максимум 4,8. Лёгкий и средний уровни совпали с быстрым симулятором полностью, на трудном собрано 5 образцов против 6.</a:t>
             </a:r>
             <a:endParaRPr lang="en-US" dirty="0"/>
           </a:p>
@@ -2624,7 +2624,7 @@
           <a:p>
             <a:r>
               <a:rPr lang="en-US" dirty="0"/>
-              <a:t>Карта стен дана заранее сеткой с клеткой 5 сантиметров, и робот строит такую же сам по лидару: карты совпадают на 96 процентов. Положение считается по колёсам и поправляется по лидару: скан совмещается с картой, ошибка около двух сантиметров. Путь ищет алгоритм Дейкстры по цене клеток, ближе 17 сантиметров к стенам робот не едет. Поверх лежат карта вероятностей образцов и карта стоимости грунта: они меняют цену клеток прямо во время прогона.</a:t>
+              <a:t>Карта стен дана заранее сеткой с клеткой 5 сантиметров, и робот строит такую же сам по лидару: карты совпадают на 96 процентов. Положение считается по колёсам, это одометрия, и поправляется по лидару: скан совмещается с картой, ошибка около двух сантиметров. Путь ищет алгоритм Дейкстры по цене клеток, ближе 17 сантиметров к стенам робот не едет. Поверх лежат карта вероятностей образцов и карта стоимости грунта: они меняют цену клеток прямо во время прогона.</a:t>
             </a:r>
             <a:endParaRPr lang="en-US" dirty="0"/>
           </a:p>
@@ -3942,7 +3942,7 @@
                   <a:schemeClr val="accent5"/>
                 </a:solidFill>
               </a:rPr>
-              <a:t>С поправкой по лидару прогоны в Gazebo повторяют быстрый симулятор</a:t>
+              <a:t>С поправкой по лидару прогоны в Gazebo повторяют быстрый симулятор с точностью до одного образца</a:t>
             </a:r>
             <a:endParaRPr lang="en-US" sz="1600" dirty="0"/>
           </a:p>
@@ -4838,7 +4838,7 @@
               <a:buNone/>
             </a:pPr>
             <a:r>
-              <a:rPr lang="en-US" sz="1300" b="1" dirty="0">
+              <a:rPr lang="en-US" sz="1400" b="1" dirty="0">
                 <a:solidFill>
                   <a:schemeClr val="accent1"/>
                 </a:solidFill>
@@ -4849,14 +4849,14 @@
               <a:buNone/>
             </a:pPr>
             <a:r>
-              <a:rPr lang="en-US" sz="1300" dirty="0">
+              <a:rPr lang="en-US" sz="1400" dirty="0">
                 <a:solidFill>
                   <a:schemeClr val="bg1"/>
                 </a:solidFill>
               </a:rPr>
-              <a:t>Около 30 с после появления в мире робот покачивается, и манёвры сбивали счёт пути — до 2,2 м. Теперь агент ждёт до 35-й секунды.</a:t>
-            </a:r>
-            <a:endParaRPr lang="en-US" sz="1300" dirty="0"/>
+              <a:t>Около 30 с после появления в мире робот покачивается, и манёвры в это время сбивали одометрию — больше чем на метр. Теперь агент ждёт до 35-й секунды.</a:t>
+            </a:r>
+            <a:endParaRPr lang="en-US" sz="1400" dirty="0"/>
           </a:p>
         </p:txBody>
       </p:sp>
@@ -4898,7 +4898,7 @@
       </p:sp>
       <p:graphicFrame>
         <p:nvGraphicFramePr>
-          <p:cNvPr id="11" name="gz-chart" descr="Ошибка положения во времени: счётчик пути уходит на десятки сантиметров, с поправкой по лидару остаётся около двух"/>
+          <p:cNvPr id="11" name="gz-chart" descr="Ошибка положения во времени: одометрия уходит на десятки сантиметров, с поправкой по лидару остаётся около двух"/>
           <p:cNvGraphicFramePr/>
           <p:nvPr/>
         </p:nvGraphicFramePr>
@@ -4942,7 +4942,7 @@
                   <a:schemeClr val="accent5"/>
                 </a:solidFill>
               </a:rPr>
-              <a:t>Серия E8, 180 прогонов: при таком уходе возврат на базу — 100% с поправкой и 33% без неё.</a:t>
+              <a:t>Серия E8, 180 прогонов: при таком уходе одометрии возврат на базу — 100% с поправкой и 33% без неё.</a:t>
             </a:r>
             <a:endParaRPr lang="en-US" sz="1100" dirty="0"/>
           </a:p>
@@ -5031,14 +5031,14 @@
               <a:buNone/>
             </a:pPr>
             <a:r>
-              <a:rPr lang="en-US" sz="1200" dirty="0">
+              <a:rPr lang="en-US" sz="1300" dirty="0">
                 <a:solidFill>
                   <a:schemeClr val="tx2"/>
                 </a:solidFill>
               </a:rPr>
               <a:t>ошибка положения с поправкой, медиана</a:t>
             </a:r>
-            <a:endParaRPr lang="en-US" sz="1200" dirty="0"/>
+            <a:endParaRPr lang="en-US" sz="1300" dirty="0"/>
           </a:p>
         </p:txBody>
       </p:sp>
@@ -5125,14 +5125,14 @@
               <a:buNone/>
             </a:pPr>
             <a:r>
-              <a:rPr lang="en-US" sz="1200" dirty="0">
+              <a:rPr lang="en-US" sz="1300" dirty="0">
                 <a:solidFill>
                   <a:schemeClr val="tx2"/>
                 </a:solidFill>
               </a:rPr>
               <a:t>наибольшая ошибка за три прогона</a:t>
             </a:r>
-            <a:endParaRPr lang="en-US" sz="1200" dirty="0"/>
+            <a:endParaRPr lang="en-US" sz="1300" dirty="0"/>
           </a:p>
         </p:txBody>
       </p:sp>
@@ -5219,14 +5219,14 @@
               <a:buNone/>
             </a:pPr>
             <a:r>
-              <a:rPr lang="en-US" sz="1200" dirty="0">
+              <a:rPr lang="en-US" sz="1300" dirty="0">
                 <a:solidFill>
                   <a:schemeClr val="tx2"/>
                 </a:solidFill>
               </a:rPr>
-              <a:t>уходил счётчик пути в тех же прогонах</a:t>
-            </a:r>
-            <a:endParaRPr lang="en-US" sz="1200" dirty="0"/>
+              <a:t>уходила одометрия в тех же прогонах</a:t>
+            </a:r>
+            <a:endParaRPr lang="en-US" sz="1300" dirty="0"/>
           </a:p>
         </p:txBody>
       </p:sp>
@@ -5385,11 +5385,11 @@
         <p:spPr>
           <a:xfrm>
             <a:off x="548640" y="1691640"/>
-            <a:ext cx="3544824" cy="2103120"/>
+            <a:ext cx="3544824" cy="2194560"/>
           </a:xfrm>
           <a:prstGeom prst="roundRect">
             <a:avLst>
-              <a:gd name="adj" fmla="val 3478"/>
+              <a:gd name="adj" fmla="val 3333"/>
             </a:avLst>
           </a:prstGeom>
           <a:solidFill>
@@ -5481,7 +5481,7 @@
         <p:spPr>
           <a:xfrm>
             <a:off x="749808" y="2441448"/>
-            <a:ext cx="3142488" cy="1261872"/>
+            <a:ext cx="3142488" cy="1353312"/>
           </a:xfrm>
           <a:prstGeom prst="rect">
             <a:avLst/>
@@ -5497,14 +5497,14 @@
               <a:buNone/>
             </a:pPr>
             <a:r>
-              <a:rPr lang="en-US" sz="1300" dirty="0">
+              <a:rPr lang="en-US" sz="1400" dirty="0">
                 <a:solidFill>
                   <a:schemeClr val="tx2"/>
                 </a:solidFill>
               </a:rPr>
               <a:t>Стенд написан за полтора дня в диалоге с Claude Code в среде T3 Code. Работа делилась на параллельные ветки, около десяти, и раздавалась вспомогательным агентам.</a:t>
             </a:r>
-            <a:endParaRPr lang="en-US" sz="1300" dirty="0"/>
+            <a:endParaRPr lang="en-US" sz="1400" dirty="0"/>
           </a:p>
         </p:txBody>
       </p:sp>
@@ -5517,11 +5517,11 @@
         <p:spPr>
           <a:xfrm>
             <a:off x="4322064" y="1691640"/>
-            <a:ext cx="3544824" cy="2103120"/>
+            <a:ext cx="3544824" cy="2194560"/>
           </a:xfrm>
           <a:prstGeom prst="roundRect">
             <a:avLst>
-              <a:gd name="adj" fmla="val 3478"/>
+              <a:gd name="adj" fmla="val 3333"/>
             </a:avLst>
           </a:prstGeom>
           <a:solidFill>
@@ -5613,7 +5613,7 @@
         <p:spPr>
           <a:xfrm>
             <a:off x="4523232" y="2441448"/>
-            <a:ext cx="3142488" cy="1261872"/>
+            <a:ext cx="3142488" cy="1353312"/>
           </a:xfrm>
           <a:prstGeom prst="rect">
             <a:avLst/>
@@ -5629,14 +5629,14 @@
               <a:buNone/>
             </a:pPr>
             <a:r>
-              <a:rPr lang="en-US" sz="1300" dirty="0">
+              <a:rPr lang="en-US" sz="1400" dirty="0">
                 <a:solidFill>
                   <a:schemeClr val="tx2"/>
                 </a:solidFill>
               </a:rPr>
               <a:t>По сложным вопросам запрашивали второе мнение у другой модели — GPT-6 Astra.</a:t>
             </a:r>
-            <a:endParaRPr lang="en-US" sz="1300" dirty="0"/>
+            <a:endParaRPr lang="en-US" sz="1400" dirty="0"/>
           </a:p>
         </p:txBody>
       </p:sp>
@@ -5649,11 +5649,11 @@
         <p:spPr>
           <a:xfrm>
             <a:off x="8095488" y="1691640"/>
-            <a:ext cx="3544824" cy="2103120"/>
+            <a:ext cx="3544824" cy="2194560"/>
           </a:xfrm>
           <a:prstGeom prst="roundRect">
             <a:avLst>
-              <a:gd name="adj" fmla="val 3478"/>
+              <a:gd name="adj" fmla="val 3333"/>
             </a:avLst>
           </a:prstGeom>
           <a:solidFill>
@@ -5745,7 +5745,7 @@
         <p:spPr>
           <a:xfrm>
             <a:off x="8296656" y="2441448"/>
-            <a:ext cx="3142488" cy="1261872"/>
+            <a:ext cx="3142488" cy="1353312"/>
           </a:xfrm>
           <a:prstGeom prst="rect">
             <a:avLst/>
@@ -5761,14 +5761,14 @@
               <a:buNone/>
             </a:pPr>
             <a:r>
-              <a:rPr lang="en-US" sz="1300" dirty="0">
+              <a:rPr lang="en-US" sz="1400" dirty="0">
                 <a:solidFill>
                   <a:schemeClr val="tx2"/>
                 </a:solidFill>
               </a:rPr>
               <a:t>Языковая модель GPT-6 Luna выбирает подцели: 97% годных планов с первого раза — 56 из 58 запросов.</a:t>
             </a:r>
-            <a:endParaRPr lang="en-US" sz="1300" dirty="0"/>
+            <a:endParaRPr lang="en-US" sz="1400" dirty="0"/>
           </a:p>
         </p:txBody>
       </p:sp>
@@ -5780,12 +5780,12 @@
         </p:nvSpPr>
         <p:spPr>
           <a:xfrm>
-            <a:off x="548640" y="4023360"/>
-            <a:ext cx="11091672" cy="1600200"/>
+            <a:off x="548640" y="4087368"/>
+            <a:ext cx="11091672" cy="1664208"/>
           </a:xfrm>
           <a:prstGeom prst="roundRect">
             <a:avLst>
-              <a:gd name="adj" fmla="val 4571"/>
+              <a:gd name="adj" fmla="val 4396"/>
             </a:avLst>
           </a:prstGeom>
           <a:solidFill>
@@ -5802,7 +5802,7 @@
         </p:nvSpPr>
         <p:spPr>
           <a:xfrm>
-            <a:off x="822960" y="4151376"/>
+            <a:off x="822960" y="4215384"/>
             <a:ext cx="10543032" cy="329184"/>
           </a:xfrm>
           <a:prstGeom prst="rect">
@@ -5838,8 +5838,8 @@
         </p:nvSpPr>
         <p:spPr>
           <a:xfrm>
-            <a:off x="822960" y="4553712"/>
-            <a:ext cx="5088636" cy="996696"/>
+            <a:off x="822960" y="4617720"/>
+            <a:ext cx="5088636" cy="1060704"/>
           </a:xfrm>
           <a:prstGeom prst="rect">
             <a:avLst/>
@@ -5859,14 +5859,14 @@
               <a:buChar char="•"/>
             </a:pPr>
             <a:r>
-              <a:rPr lang="en-US" sz="1300" dirty="0">
+              <a:rPr lang="en-US" sz="1400" dirty="0">
                 <a:solidFill>
                   <a:schemeClr val="bg1"/>
                 </a:solidFill>
               </a:rPr>
               <a:t>ложные следы в карте вероятностей после сбора образца</a:t>
             </a:r>
-            <a:endParaRPr lang="en-US" sz="1300" dirty="0"/>
+            <a:endParaRPr lang="en-US" sz="1400" dirty="0"/>
           </a:p>
           <a:p>
             <a:pPr algn="l" marL="342900" indent="-342900">
@@ -5877,14 +5877,14 @@
               <a:buChar char="•"/>
             </a:pPr>
             <a:r>
-              <a:rPr lang="en-US" sz="1300" dirty="0">
+              <a:rPr lang="en-US" sz="1400" dirty="0">
                 <a:solidFill>
                   <a:schemeClr val="bg1"/>
                 </a:solidFill>
               </a:rPr>
               <a:t>агент бросал работу с полной батареей: цена маршрута была смешана с зарядом на дорогу</a:t>
             </a:r>
-            <a:endParaRPr lang="en-US" sz="1300" dirty="0"/>
+            <a:endParaRPr lang="en-US" sz="1400" dirty="0"/>
           </a:p>
         </p:txBody>
       </p:sp>
@@ -5896,8 +5896,8 @@
         </p:nvSpPr>
         <p:spPr>
           <a:xfrm>
-            <a:off x="6277356" y="4553712"/>
-            <a:ext cx="5088636" cy="996696"/>
+            <a:off x="6277356" y="4617720"/>
+            <a:ext cx="5088636" cy="1060704"/>
           </a:xfrm>
           <a:prstGeom prst="rect">
             <a:avLst/>
@@ -5917,14 +5917,14 @@
               <a:buChar char="•"/>
             </a:pPr>
             <a:r>
-              <a:rPr lang="en-US" sz="1300" dirty="0">
+              <a:rPr lang="en-US" sz="1400" dirty="0">
                 <a:solidFill>
                   <a:schemeClr val="bg1"/>
                 </a:solidFill>
               </a:rPr>
-              <a:t>робот покачивается после появления в Gazebo — счёт пути уходил на метр</a:t>
-            </a:r>
-            <a:endParaRPr lang="en-US" sz="1300" dirty="0"/>
+              <a:t>робот покачивается после появления в Gazebo — одометрия уходила на метр</a:t>
+            </a:r>
+            <a:endParaRPr lang="en-US" sz="1400" dirty="0"/>
           </a:p>
           <a:p>
             <a:pPr algn="l" marL="342900" indent="-342900">
@@ -5935,14 +5935,14 @@
               <a:buChar char="•"/>
             </a:pPr>
             <a:r>
-              <a:rPr lang="en-US" sz="1300" dirty="0">
+              <a:rPr lang="en-US" sz="1400" dirty="0">
                 <a:solidFill>
                   <a:schemeClr val="bg1"/>
                 </a:solidFill>
               </a:rPr>
               <a:t>сотня ложных сборов подряд при неверной поправке датчика</a:t>
             </a:r>
-            <a:endParaRPr lang="en-US" sz="1300" dirty="0"/>
+            <a:endParaRPr lang="en-US" sz="1400" dirty="0"/>
           </a:p>
         </p:txBody>
       </p:sp>
@@ -5954,8 +5954,8 @@
         </p:nvSpPr>
         <p:spPr>
           <a:xfrm>
-            <a:off x="548640" y="5733288"/>
-            <a:ext cx="11091672" cy="484632"/>
+            <a:off x="548640" y="5824728"/>
+            <a:ext cx="11091672" cy="393192"/>
           </a:xfrm>
           <a:prstGeom prst="rect">
             <a:avLst/>
@@ -7310,14 +7310,14 @@
               <a:buNone/>
             </a:pPr>
             <a:r>
-              <a:rPr lang="en-US" sz="1200" dirty="0">
+              <a:rPr lang="en-US" sz="1300" dirty="0">
                 <a:solidFill>
                   <a:schemeClr val="tx2"/>
                 </a:solidFill>
               </a:rPr>
               <a:t>база, заряд 60; стены известны, образцы — нет</a:t>
             </a:r>
-            <a:endParaRPr lang="en-US" sz="1200" dirty="0"/>
+            <a:endParaRPr lang="en-US" sz="1300" dirty="0"/>
           </a:p>
         </p:txBody>
       </p:sp>
@@ -7420,14 +7420,14 @@
               <a:buNone/>
             </a:pPr>
             <a:r>
-              <a:rPr lang="en-US" sz="1200" dirty="0">
+              <a:rPr lang="en-US" sz="1300" dirty="0">
                 <a:solidFill>
                   <a:schemeClr val="tx2"/>
                 </a:solidFill>
               </a:rPr>
-              <a:t>по датчику близости уточняет карту вероятностей</a:t>
-            </a:r>
-            <a:endParaRPr lang="en-US" sz="1200" dirty="0"/>
+              <a:t>слушает датчик, уточняет карту вероятностей</a:t>
+            </a:r>
+            <a:endParaRPr lang="en-US" sz="1300" dirty="0"/>
           </a:p>
         </p:txBody>
       </p:sp>
@@ -7530,14 +7530,14 @@
               <a:buNone/>
             </a:pPr>
             <a:r>
-              <a:rPr lang="en-US" sz="1200" dirty="0">
+              <a:rPr lang="en-US" sz="1300" dirty="0">
                 <a:solidFill>
                   <a:schemeClr val="tx2"/>
                 </a:solidFill>
               </a:rPr>
               <a:t>подъезжает ближе 30 см и забирает образец</a:t>
             </a:r>
-            <a:endParaRPr lang="en-US" sz="1200" dirty="0"/>
+            <a:endParaRPr lang="en-US" sz="1300" dirty="0"/>
           </a:p>
         </p:txBody>
       </p:sp>
@@ -7640,14 +7640,14 @@
               <a:buNone/>
             </a:pPr>
             <a:r>
-              <a:rPr lang="en-US" sz="1200" dirty="0">
+              <a:rPr lang="en-US" sz="1300" dirty="0">
                 <a:solidFill>
                   <a:schemeClr val="tx2"/>
                 </a:solidFill>
               </a:rPr>
               <a:t>штраф, расход, шум: причина ищется опытом</a:t>
             </a:r>
-            <a:endParaRPr lang="en-US" sz="1200" dirty="0"/>
+            <a:endParaRPr lang="en-US" sz="1300" dirty="0"/>
           </a:p>
         </p:txBody>
       </p:sp>
@@ -7750,14 +7750,14 @@
               <a:buNone/>
             </a:pPr>
             <a:r>
-              <a:rPr lang="en-US" sz="1200" dirty="0">
+              <a:rPr lang="en-US" sz="1300" dirty="0">
                 <a:solidFill>
                   <a:schemeClr val="tx2"/>
                 </a:solidFill>
               </a:rPr>
               <a:t>считает заряд на дорогу и едет на базу</a:t>
             </a:r>
-            <a:endParaRPr lang="en-US" sz="1200" dirty="0"/>
+            <a:endParaRPr lang="en-US" sz="1300" dirty="0"/>
           </a:p>
         </p:txBody>
       </p:sp>
@@ -7777,8 +7777,8 @@
         </p:blipFill>
         <p:spPr>
           <a:xfrm>
-            <a:off x="548640" y="2743200"/>
-            <a:ext cx="2395728" cy="2295107"/>
+            <a:off x="548640" y="2761488"/>
+            <a:ext cx="2331720" cy="2233788"/>
           </a:xfrm>
           <a:prstGeom prst="rect">
             <a:avLst/>
@@ -7793,31 +7793,31 @@
         </p:nvSpPr>
         <p:spPr>
           <a:xfrm>
-            <a:off x="457200" y="5084027"/>
-            <a:ext cx="2578608" cy="256032"/>
-          </a:xfrm>
-          <a:prstGeom prst="rect">
-            <a:avLst/>
-          </a:prstGeom>
-          <a:noFill/>
-          <a:ln/>
-        </p:spPr>
-        <p:txBody>
-          <a:bodyPr wrap="square" lIns="0" tIns="0" rIns="0" bIns="0" rtlCol="0" anchor="t"/>
+            <a:off x="411480" y="5031852"/>
+            <a:ext cx="2606040" cy="256032"/>
+          </a:xfrm>
+          <a:prstGeom prst="rect">
+            <a:avLst/>
+          </a:prstGeom>
+          <a:noFill/>
+          <a:ln/>
+        </p:spPr>
+        <p:txBody>
+          <a:bodyPr wrap="square" lIns="0" tIns="0" rIns="0" bIns="0" rtlCol="0" anchor="ctr"/>
           <a:lstStyle/>
           <a:p>
             <a:pPr algn="ctr" indent="0" marL="0">
               <a:buNone/>
             </a:pPr>
             <a:r>
-              <a:rPr lang="en-US" sz="1200" b="1" dirty="0">
+              <a:rPr lang="en-US" sz="1300" b="1" dirty="0">
                 <a:solidFill>
                   <a:schemeClr val="tx1"/>
                 </a:solidFill>
               </a:rPr>
-              <a:t>5-я секунда · заряд 58 · собрано 0 из 7</a:t>
-            </a:r>
-            <a:endParaRPr lang="en-US" sz="1200" dirty="0"/>
+              <a:t>5 с · заряд 58 · собрано 0 из 7</a:t>
+            </a:r>
+            <a:endParaRPr lang="en-US" sz="1300" dirty="0"/>
           </a:p>
         </p:txBody>
       </p:sp>
@@ -7829,8 +7829,8 @@
         </p:nvSpPr>
         <p:spPr>
           <a:xfrm>
-            <a:off x="457200" y="5349203"/>
-            <a:ext cx="2578608" cy="502920"/>
+            <a:off x="411480" y="5306172"/>
+            <a:ext cx="2606040" cy="530352"/>
           </a:xfrm>
           <a:prstGeom prst="rect">
             <a:avLst/>
@@ -7873,8 +7873,8 @@
         </p:blipFill>
         <p:spPr>
           <a:xfrm>
-            <a:off x="3447288" y="2743200"/>
-            <a:ext cx="2395728" cy="2295107"/>
+            <a:off x="3468624" y="2761488"/>
+            <a:ext cx="2331720" cy="2233788"/>
           </a:xfrm>
           <a:prstGeom prst="rect">
             <a:avLst/>
@@ -7889,31 +7889,31 @@
         </p:nvSpPr>
         <p:spPr>
           <a:xfrm>
-            <a:off x="3355848" y="5084027"/>
-            <a:ext cx="2578608" cy="256032"/>
-          </a:xfrm>
-          <a:prstGeom prst="rect">
-            <a:avLst/>
-          </a:prstGeom>
-          <a:noFill/>
-          <a:ln/>
-        </p:spPr>
-        <p:txBody>
-          <a:bodyPr wrap="square" lIns="0" tIns="0" rIns="0" bIns="0" rtlCol="0" anchor="t"/>
+            <a:off x="3331464" y="5031852"/>
+            <a:ext cx="2606040" cy="256032"/>
+          </a:xfrm>
+          <a:prstGeom prst="rect">
+            <a:avLst/>
+          </a:prstGeom>
+          <a:noFill/>
+          <a:ln/>
+        </p:spPr>
+        <p:txBody>
+          <a:bodyPr wrap="square" lIns="0" tIns="0" rIns="0" bIns="0" rtlCol="0" anchor="ctr"/>
           <a:lstStyle/>
           <a:p>
             <a:pPr algn="ctr" indent="0" marL="0">
               <a:buNone/>
             </a:pPr>
             <a:r>
-              <a:rPr lang="en-US" sz="1200" b="1" dirty="0">
+              <a:rPr lang="en-US" sz="1300" b="1" dirty="0">
                 <a:solidFill>
                   <a:schemeClr val="tx1"/>
                 </a:solidFill>
               </a:rPr>
-              <a:t>27-я секунда · заряд 45 · собрано 2 из 7</a:t>
-            </a:r>
-            <a:endParaRPr lang="en-US" sz="1200" dirty="0"/>
+              <a:t>27 с · заряд 45 · собрано 2 из 7</a:t>
+            </a:r>
+            <a:endParaRPr lang="en-US" sz="1300" dirty="0"/>
           </a:p>
         </p:txBody>
       </p:sp>
@@ -7925,8 +7925,8 @@
         </p:nvSpPr>
         <p:spPr>
           <a:xfrm>
-            <a:off x="3355848" y="5349203"/>
-            <a:ext cx="2578608" cy="502920"/>
+            <a:off x="3331464" y="5306172"/>
+            <a:ext cx="2606040" cy="530352"/>
           </a:xfrm>
           <a:prstGeom prst="rect">
             <a:avLst/>
@@ -7969,8 +7969,8 @@
         </p:blipFill>
         <p:spPr>
           <a:xfrm>
-            <a:off x="6345936" y="2743200"/>
-            <a:ext cx="2395728" cy="2295107"/>
+            <a:off x="6388608" y="2761488"/>
+            <a:ext cx="2331720" cy="2233788"/>
           </a:xfrm>
           <a:prstGeom prst="rect">
             <a:avLst/>
@@ -7985,8 +7985,44 @@
         </p:nvSpPr>
         <p:spPr>
           <a:xfrm>
-            <a:off x="6254496" y="5084027"/>
-            <a:ext cx="2578608" cy="256032"/>
+            <a:off x="6251448" y="5031852"/>
+            <a:ext cx="2606040" cy="256032"/>
+          </a:xfrm>
+          <a:prstGeom prst="rect">
+            <a:avLst/>
+          </a:prstGeom>
+          <a:noFill/>
+          <a:ln/>
+        </p:spPr>
+        <p:txBody>
+          <a:bodyPr wrap="square" lIns="0" tIns="0" rIns="0" bIns="0" rtlCol="0" anchor="ctr"/>
+          <a:lstStyle/>
+          <a:p>
+            <a:pPr algn="ctr" indent="0" marL="0">
+              <a:buNone/>
+            </a:pPr>
+            <a:r>
+              <a:rPr lang="en-US" sz="1300" b="1" dirty="0">
+                <a:solidFill>
+                  <a:schemeClr val="tx1"/>
+                </a:solidFill>
+              </a:rPr>
+              <a:t>35 с · заряд 39 · собрано 2 из 7</a:t>
+            </a:r>
+            <a:endParaRPr lang="en-US" sz="1300" dirty="0"/>
+          </a:p>
+        </p:txBody>
+      </p:sp>
+      <p:sp>
+        <p:nvSpPr>
+          <p:cNvPr id="28" name="frame-3-quote"/>
+          <p:cNvSpPr txBox="1"/>
+          <p:nvPr/>
+        </p:nvSpPr>
+        <p:spPr>
+          <a:xfrm>
+            <a:off x="6251448" y="5306172"/>
+            <a:ext cx="2606040" cy="530352"/>
           </a:xfrm>
           <a:prstGeom prst="rect">
             <a:avLst/>
@@ -8002,48 +8038,12 @@
               <a:buNone/>
             </a:pPr>
             <a:r>
-              <a:rPr lang="en-US" sz="1200" b="1" dirty="0">
-                <a:solidFill>
-                  <a:schemeClr val="tx1"/>
-                </a:solidFill>
-              </a:rPr>
-              <a:t>35-я секунда · заряд 39 · собрано 2 из 7</a:t>
-            </a:r>
-            <a:endParaRPr lang="en-US" sz="1200" dirty="0"/>
-          </a:p>
-        </p:txBody>
-      </p:sp>
-      <p:sp>
-        <p:nvSpPr>
-          <p:cNvPr id="28" name="frame-3-quote"/>
-          <p:cNvSpPr txBox="1"/>
-          <p:nvPr/>
-        </p:nvSpPr>
-        <p:spPr>
-          <a:xfrm>
-            <a:off x="6254496" y="5349203"/>
-            <a:ext cx="2578608" cy="502920"/>
-          </a:xfrm>
-          <a:prstGeom prst="rect">
-            <a:avLst/>
-          </a:prstGeom>
-          <a:noFill/>
-          <a:ln/>
-        </p:spPr>
-        <p:txBody>
-          <a:bodyPr wrap="square" lIns="0" tIns="0" rIns="0" bIns="0" rtlCol="0" anchor="t"/>
-          <a:lstStyle/>
-          <a:p>
-            <a:pPr algn="ctr" indent="0" marL="0">
-              <a:buNone/>
-            </a:pPr>
-            <a:r>
               <a:rPr lang="en-US" sz="1100" dirty="0">
                 <a:solidFill>
                   <a:schemeClr val="tx2"/>
                 </a:solidFill>
               </a:rPr>
-              <a:t>Журнал: «H8: датчик образцов неисправен, его показаниям нельзя верить…»</a:t>
+              <a:t>Журнал: «H8: датчик образцов неисправен»</a:t>
             </a:r>
             <a:endParaRPr lang="en-US" sz="1100" dirty="0"/>
           </a:p>
@@ -8065,8 +8065,8 @@
         </p:blipFill>
         <p:spPr>
           <a:xfrm>
-            <a:off x="9244584" y="2743200"/>
-            <a:ext cx="2395728" cy="2295107"/>
+            <a:off x="9308592" y="2761488"/>
+            <a:ext cx="2331720" cy="2233788"/>
           </a:xfrm>
           <a:prstGeom prst="rect">
             <a:avLst/>
@@ -8081,8 +8081,44 @@
         </p:nvSpPr>
         <p:spPr>
           <a:xfrm>
-            <a:off x="9153144" y="5084027"/>
-            <a:ext cx="2578608" cy="256032"/>
+            <a:off x="9171432" y="5031852"/>
+            <a:ext cx="2606040" cy="256032"/>
+          </a:xfrm>
+          <a:prstGeom prst="rect">
+            <a:avLst/>
+          </a:prstGeom>
+          <a:noFill/>
+          <a:ln/>
+        </p:spPr>
+        <p:txBody>
+          <a:bodyPr wrap="square" lIns="0" tIns="0" rIns="0" bIns="0" rtlCol="0" anchor="ctr"/>
+          <a:lstStyle/>
+          <a:p>
+            <a:pPr algn="ctr" indent="0" marL="0">
+              <a:buNone/>
+            </a:pPr>
+            <a:r>
+              <a:rPr lang="en-US" sz="1300" b="1" dirty="0">
+                <a:solidFill>
+                  <a:schemeClr val="tx1"/>
+                </a:solidFill>
+              </a:rPr>
+              <a:t>98 с · заряд 8 · собрано 5 из 7</a:t>
+            </a:r>
+            <a:endParaRPr lang="en-US" sz="1300" dirty="0"/>
+          </a:p>
+        </p:txBody>
+      </p:sp>
+      <p:sp>
+        <p:nvSpPr>
+          <p:cNvPr id="31" name="frame-4-quote"/>
+          <p:cNvSpPr txBox="1"/>
+          <p:nvPr/>
+        </p:nvSpPr>
+        <p:spPr>
+          <a:xfrm>
+            <a:off x="9171432" y="5306172"/>
+            <a:ext cx="2606040" cy="530352"/>
           </a:xfrm>
           <a:prstGeom prst="rect">
             <a:avLst/>
@@ -8098,48 +8134,12 @@
               <a:buNone/>
             </a:pPr>
             <a:r>
-              <a:rPr lang="en-US" sz="1200" b="1" dirty="0">
-                <a:solidFill>
-                  <a:schemeClr val="tx1"/>
-                </a:solidFill>
-              </a:rPr>
-              <a:t>98-я секунда · заряд 8 · собрано 5 из 7</a:t>
-            </a:r>
-            <a:endParaRPr lang="en-US" sz="1200" dirty="0"/>
-          </a:p>
-        </p:txBody>
-      </p:sp>
-      <p:sp>
-        <p:nvSpPr>
-          <p:cNvPr id="31" name="frame-4-quote"/>
-          <p:cNvSpPr txBox="1"/>
-          <p:nvPr/>
-        </p:nvSpPr>
-        <p:spPr>
-          <a:xfrm>
-            <a:off x="9153144" y="5349203"/>
-            <a:ext cx="2578608" cy="502920"/>
-          </a:xfrm>
-          <a:prstGeom prst="rect">
-            <a:avLst/>
-          </a:prstGeom>
-          <a:noFill/>
-          <a:ln/>
-        </p:spPr>
-        <p:txBody>
-          <a:bodyPr wrap="square" lIns="0" tIns="0" rIns="0" bIns="0" rtlCol="0" anchor="t"/>
-          <a:lstStyle/>
-          <a:p>
-            <a:pPr algn="ctr" indent="0" marL="0">
-              <a:buNone/>
-            </a:pPr>
-            <a:r>
               <a:rPr lang="en-US" sz="1100" dirty="0">
                 <a:solidFill>
                   <a:schemeClr val="tx2"/>
                 </a:solidFill>
               </a:rPr>
-              <a:t>Журнал: «Финиш: возврат на базу засчитан. Собрано 5 из 7, заряд 8,1»</a:t>
+              <a:t>Журнал: «Финиш: возврат на базу засчитан. Собрано 5 из 7»</a:t>
             </a:r>
             <a:endParaRPr lang="en-US" sz="1100" dirty="0"/>
           </a:p>
@@ -8153,8 +8153,8 @@
         </p:nvSpPr>
         <p:spPr>
           <a:xfrm>
-            <a:off x="548640" y="5943600"/>
-            <a:ext cx="11091672" cy="274320"/>
+            <a:off x="548640" y="5961888"/>
+            <a:ext cx="11091672" cy="256032"/>
           </a:xfrm>
           <a:prstGeom prst="rect">
             <a:avLst/>
@@ -8336,7 +8336,7 @@
         <p:spPr>
           <a:xfrm>
             <a:off x="548640" y="1691640"/>
-            <a:ext cx="3977640" cy="2926080"/>
+            <a:ext cx="3657600" cy="2926080"/>
           </a:xfrm>
           <a:prstGeom prst="roundRect">
             <a:avLst>
@@ -8394,7 +8394,7 @@
         <p:spPr>
           <a:xfrm>
             <a:off x="731520" y="2148840"/>
-            <a:ext cx="3611880" cy="658368"/>
+            <a:ext cx="3291840" cy="658368"/>
           </a:xfrm>
           <a:prstGeom prst="roundRect">
             <a:avLst>
@@ -8416,7 +8416,7 @@
         <p:spPr>
           <a:xfrm>
             <a:off x="896112" y="2212848"/>
-            <a:ext cx="3282696" cy="274320"/>
+            <a:ext cx="2962656" cy="274320"/>
           </a:xfrm>
           <a:prstGeom prst="rect">
             <a:avLst/>
@@ -8452,7 +8452,7 @@
         <p:spPr>
           <a:xfrm>
             <a:off x="896112" y="2496312"/>
-            <a:ext cx="3282696" cy="274320"/>
+            <a:ext cx="2962656" cy="274320"/>
           </a:xfrm>
           <a:prstGeom prst="rect">
             <a:avLst/>
@@ -8468,14 +8468,14 @@
               <a:buNone/>
             </a:pPr>
             <a:r>
-              <a:rPr lang="en-US" sz="1200" dirty="0">
+              <a:rPr lang="en-US" sz="1300" dirty="0">
                 <a:solidFill>
                   <a:schemeClr val="tx2"/>
                 </a:solidFill>
               </a:rPr>
               <a:t>уровень и номер → расстановка</a:t>
             </a:r>
-            <a:endParaRPr lang="en-US" sz="1200" dirty="0"/>
+            <a:endParaRPr lang="en-US" sz="1300" dirty="0"/>
           </a:p>
         </p:txBody>
       </p:sp>
@@ -8488,7 +8488,7 @@
         <p:spPr>
           <a:xfrm>
             <a:off x="731520" y="2916936"/>
-            <a:ext cx="3611880" cy="749808"/>
+            <a:ext cx="3291840" cy="749808"/>
           </a:xfrm>
           <a:prstGeom prst="roundRect">
             <a:avLst>
@@ -8510,7 +8510,7 @@
         <p:spPr>
           <a:xfrm>
             <a:off x="896112" y="2980944"/>
-            <a:ext cx="3282696" cy="274320"/>
+            <a:ext cx="2962656" cy="274320"/>
           </a:xfrm>
           <a:prstGeom prst="rect">
             <a:avLst/>
@@ -8546,7 +8546,7 @@
         <p:spPr>
           <a:xfrm>
             <a:off x="896112" y="3264408"/>
-            <a:ext cx="3282696" cy="365760"/>
+            <a:ext cx="2962656" cy="365760"/>
           </a:xfrm>
           <a:prstGeom prst="rect">
             <a:avLst/>
@@ -8562,14 +8562,14 @@
               <a:buNone/>
             </a:pPr>
             <a:r>
-              <a:rPr lang="en-US" sz="1200" dirty="0">
+              <a:rPr lang="en-US" sz="1300" dirty="0">
                 <a:solidFill>
                   <a:schemeClr val="tx2"/>
                 </a:solidFill>
               </a:rPr>
-              <a:t>скрытая правда: заряд, датчик, штрафы, очки</a:t>
-            </a:r>
-            <a:endParaRPr lang="en-US" sz="1200" dirty="0"/>
+              <a:t>заряд, датчик, штрафы, очки</a:t>
+            </a:r>
+            <a:endParaRPr lang="en-US" sz="1300" dirty="0"/>
           </a:p>
         </p:txBody>
       </p:sp>
@@ -8582,7 +8582,7 @@
         <p:spPr>
           <a:xfrm>
             <a:off x="731520" y="3776472"/>
-            <a:ext cx="3611880" cy="713232"/>
+            <a:ext cx="3291840" cy="713232"/>
           </a:xfrm>
           <a:prstGeom prst="roundRect">
             <a:avLst>
@@ -8604,7 +8604,7 @@
         <p:spPr>
           <a:xfrm>
             <a:off x="896112" y="3840480"/>
-            <a:ext cx="3282696" cy="274320"/>
+            <a:ext cx="2962656" cy="274320"/>
           </a:xfrm>
           <a:prstGeom prst="rect">
             <a:avLst/>
@@ -8640,7 +8640,7 @@
         <p:spPr>
           <a:xfrm>
             <a:off x="896112" y="4123944"/>
-            <a:ext cx="3282696" cy="329184"/>
+            <a:ext cx="2962656" cy="329184"/>
           </a:xfrm>
           <a:prstGeom prst="rect">
             <a:avLst/>
@@ -8656,14 +8656,14 @@
               <a:buNone/>
             </a:pPr>
             <a:r>
-              <a:rPr lang="en-US" sz="1200" dirty="0">
+              <a:rPr lang="en-US" sz="1300" dirty="0">
                 <a:solidFill>
                   <a:schemeClr val="tx2"/>
                 </a:solidFill>
               </a:rPr>
-              <a:t>Gazebo — показ · быстрый — серии, 0,1 с на прогон</a:t>
-            </a:r>
-            <a:endParaRPr lang="en-US" sz="1200" dirty="0"/>
+              <a:t>Gazebo — показ, быстрый — серии</a:t>
+            </a:r>
+            <a:endParaRPr lang="en-US" sz="1300" dirty="0"/>
           </a:p>
         </p:txBody>
       </p:sp>
@@ -8675,8 +8675,8 @@
         </p:nvSpPr>
         <p:spPr>
           <a:xfrm>
-            <a:off x="6903720" y="1691640"/>
-            <a:ext cx="4736592" cy="2926080"/>
+            <a:off x="7086600" y="1691640"/>
+            <a:ext cx="4553712" cy="2926080"/>
           </a:xfrm>
           <a:prstGeom prst="roundRect">
             <a:avLst>
@@ -8697,7 +8697,7 @@
         </p:nvSpPr>
         <p:spPr>
           <a:xfrm>
-            <a:off x="7132320" y="1801368"/>
+            <a:off x="7315200" y="1801368"/>
             <a:ext cx="1828800" cy="274320"/>
           </a:xfrm>
           <a:prstGeom prst="rect">
@@ -8733,8 +8733,8 @@
         </p:nvSpPr>
         <p:spPr>
           <a:xfrm>
-            <a:off x="7086600" y="2148840"/>
-            <a:ext cx="2093976" cy="1115568"/>
+            <a:off x="7269480" y="2148840"/>
+            <a:ext cx="2002536" cy="1115568"/>
           </a:xfrm>
           <a:prstGeom prst="roundRect">
             <a:avLst>
@@ -8755,8 +8755,8 @@
         </p:nvSpPr>
         <p:spPr>
           <a:xfrm>
-            <a:off x="7251192" y="2240280"/>
-            <a:ext cx="1764792" cy="292608"/>
+            <a:off x="7434072" y="2240280"/>
+            <a:ext cx="1673352" cy="292608"/>
           </a:xfrm>
           <a:prstGeom prst="rect">
             <a:avLst/>
@@ -8791,8 +8791,8 @@
         </p:nvSpPr>
         <p:spPr>
           <a:xfrm>
-            <a:off x="7251192" y="2560320"/>
-            <a:ext cx="1764792" cy="658368"/>
+            <a:off x="7434072" y="2560320"/>
+            <a:ext cx="1673352" cy="658368"/>
           </a:xfrm>
           <a:prstGeom prst="rect">
             <a:avLst/>
@@ -8808,14 +8808,14 @@
               <a:buNone/>
             </a:pPr>
             <a:r>
-              <a:rPr lang="en-US" sz="1200" dirty="0">
+              <a:rPr lang="en-US" sz="1300" dirty="0">
                 <a:solidFill>
                   <a:schemeClr val="bg2"/>
                 </a:solidFill>
               </a:rPr>
               <a:t>образцы, грунт, опасные зоны, положение</a:t>
             </a:r>
-            <a:endParaRPr lang="en-US" sz="1200" dirty="0"/>
+            <a:endParaRPr lang="en-US" sz="1300" dirty="0"/>
           </a:p>
         </p:txBody>
       </p:sp>
@@ -8827,8 +8827,8 @@
         </p:nvSpPr>
         <p:spPr>
           <a:xfrm>
-            <a:off x="9363456" y="2148840"/>
-            <a:ext cx="2093976" cy="1115568"/>
+            <a:off x="9454896" y="2148840"/>
+            <a:ext cx="2002536" cy="1115568"/>
           </a:xfrm>
           <a:prstGeom prst="roundRect">
             <a:avLst>
@@ -8849,8 +8849,8 @@
         </p:nvSpPr>
         <p:spPr>
           <a:xfrm>
-            <a:off x="9528048" y="2240280"/>
-            <a:ext cx="1764792" cy="292608"/>
+            <a:off x="9619488" y="2240280"/>
+            <a:ext cx="1673352" cy="292608"/>
           </a:xfrm>
           <a:prstGeom prst="rect">
             <a:avLst/>
@@ -8885,8 +8885,8 @@
         </p:nvSpPr>
         <p:spPr>
           <a:xfrm>
-            <a:off x="9528048" y="2560320"/>
-            <a:ext cx="1764792" cy="658368"/>
+            <a:off x="9619488" y="2560320"/>
+            <a:ext cx="1673352" cy="658368"/>
           </a:xfrm>
           <a:prstGeom prst="rect">
             <a:avLst/>
@@ -8902,14 +8902,14 @@
               <a:buNone/>
             </a:pPr>
             <a:r>
-              <a:rPr lang="en-US" sz="1200" dirty="0">
+              <a:rPr lang="en-US" sz="1300" dirty="0">
                 <a:solidFill>
                   <a:schemeClr val="bg2"/>
                 </a:solidFill>
               </a:rPr>
               <a:t>правило или языковая модель</a:t>
             </a:r>
-            <a:endParaRPr lang="en-US" sz="1200" dirty="0"/>
+            <a:endParaRPr lang="en-US" sz="1300" dirty="0"/>
           </a:p>
         </p:txBody>
       </p:sp>
@@ -8921,8 +8921,8 @@
         </p:nvSpPr>
         <p:spPr>
           <a:xfrm>
-            <a:off x="7086600" y="3392424"/>
-            <a:ext cx="2093976" cy="1115568"/>
+            <a:off x="7269480" y="3392424"/>
+            <a:ext cx="2002536" cy="1115568"/>
           </a:xfrm>
           <a:prstGeom prst="roundRect">
             <a:avLst>
@@ -8943,8 +8943,8 @@
         </p:nvSpPr>
         <p:spPr>
           <a:xfrm>
-            <a:off x="7251192" y="3483864"/>
-            <a:ext cx="1764792" cy="292608"/>
+            <a:off x="7434072" y="3483864"/>
+            <a:ext cx="1673352" cy="292608"/>
           </a:xfrm>
           <a:prstGeom prst="rect">
             <a:avLst/>
@@ -8979,8 +8979,8 @@
         </p:nvSpPr>
         <p:spPr>
           <a:xfrm>
-            <a:off x="7251192" y="3803904"/>
-            <a:ext cx="1764792" cy="658368"/>
+            <a:off x="7434072" y="3803904"/>
+            <a:ext cx="1673352" cy="658368"/>
           </a:xfrm>
           <a:prstGeom prst="rect">
             <a:avLst/>
@@ -8996,14 +8996,14 @@
               <a:buNone/>
             </a:pPr>
             <a:r>
-              <a:rPr lang="en-US" sz="1200" dirty="0">
+              <a:rPr lang="en-US" sz="1300" dirty="0">
                 <a:solidFill>
                   <a:schemeClr val="bg2"/>
                 </a:solidFill>
               </a:rPr>
               <a:t>путь по сетке и скорость колёс</a:t>
             </a:r>
-            <a:endParaRPr lang="en-US" sz="1200" dirty="0"/>
+            <a:endParaRPr lang="en-US" sz="1300" dirty="0"/>
           </a:p>
         </p:txBody>
       </p:sp>
@@ -9015,8 +9015,8 @@
         </p:nvSpPr>
         <p:spPr>
           <a:xfrm>
-            <a:off x="9363456" y="3392424"/>
-            <a:ext cx="2093976" cy="1115568"/>
+            <a:off x="9454896" y="3392424"/>
+            <a:ext cx="2002536" cy="1115568"/>
           </a:xfrm>
           <a:prstGeom prst="roundRect">
             <a:avLst>
@@ -9037,8 +9037,8 @@
         </p:nvSpPr>
         <p:spPr>
           <a:xfrm>
-            <a:off x="9528048" y="3483864"/>
-            <a:ext cx="1764792" cy="292608"/>
+            <a:off x="9619488" y="3483864"/>
+            <a:ext cx="1673352" cy="292608"/>
           </a:xfrm>
           <a:prstGeom prst="rect">
             <a:avLst/>
@@ -9073,8 +9073,8 @@
         </p:nvSpPr>
         <p:spPr>
           <a:xfrm>
-            <a:off x="9528048" y="3803904"/>
-            <a:ext cx="1764792" cy="658368"/>
+            <a:off x="9619488" y="3803904"/>
+            <a:ext cx="1673352" cy="658368"/>
           </a:xfrm>
           <a:prstGeom prst="rect">
             <a:avLst/>
@@ -9090,14 +9090,14 @@
               <a:buNone/>
             </a:pPr>
             <a:r>
-              <a:rPr lang="en-US" sz="1200" dirty="0">
+              <a:rPr lang="en-US" sz="1300" dirty="0">
                 <a:solidFill>
                   <a:schemeClr val="bg2"/>
                 </a:solidFill>
               </a:rPr>
               <a:t>что предположил, как проверил, что вышло</a:t>
             </a:r>
-            <a:endParaRPr lang="en-US" sz="1200" dirty="0"/>
+            <a:endParaRPr lang="en-US" sz="1300" dirty="0"/>
           </a:p>
         </p:txBody>
       </p:sp>
@@ -9109,8 +9109,8 @@
         </p:nvSpPr>
         <p:spPr>
           <a:xfrm>
-            <a:off x="4617720" y="3246120"/>
-            <a:ext cx="2194560" cy="0"/>
+            <a:off x="4297680" y="3246120"/>
+            <a:ext cx="2697480" cy="0"/>
           </a:xfrm>
           <a:prstGeom prst="line">
             <a:avLst/>
@@ -9134,8 +9134,8 @@
         </p:nvSpPr>
         <p:spPr>
           <a:xfrm>
-            <a:off x="4617720" y="2807208"/>
-            <a:ext cx="2194560" cy="402336"/>
+            <a:off x="4297680" y="2807208"/>
+            <a:ext cx="2697480" cy="402336"/>
           </a:xfrm>
           <a:prstGeom prst="rect">
             <a:avLst/>
@@ -9190,8 +9190,8 @@
         </p:nvSpPr>
         <p:spPr>
           <a:xfrm>
-            <a:off x="4617720" y="3447288"/>
-            <a:ext cx="2194560" cy="0"/>
+            <a:off x="4297680" y="3447288"/>
+            <a:ext cx="2697480" cy="0"/>
           </a:xfrm>
           <a:prstGeom prst="line">
             <a:avLst/>
@@ -9215,8 +9215,8 @@
         </p:nvSpPr>
         <p:spPr>
           <a:xfrm>
-            <a:off x="4617720" y="3483864"/>
-            <a:ext cx="2194560" cy="219456"/>
+            <a:off x="4297680" y="3483864"/>
+            <a:ext cx="2697480" cy="219456"/>
           </a:xfrm>
           <a:prstGeom prst="rect">
             <a:avLst/>
@@ -9254,8 +9254,8 @@
         </p:nvSpPr>
         <p:spPr>
           <a:xfrm>
-            <a:off x="4617720" y="4087368"/>
-            <a:ext cx="2194560" cy="0"/>
+            <a:off x="4297680" y="4087368"/>
+            <a:ext cx="2697480" cy="0"/>
           </a:xfrm>
           <a:prstGeom prst="line">
             <a:avLst/>
@@ -9279,8 +9279,8 @@
         </p:nvSpPr>
         <p:spPr>
           <a:xfrm>
-            <a:off x="4617720" y="3849624"/>
-            <a:ext cx="2194560" cy="219456"/>
+            <a:off x="4297680" y="3849624"/>
+            <a:ext cx="2697480" cy="219456"/>
           </a:xfrm>
           <a:prstGeom prst="rect">
             <a:avLst/>
@@ -9318,8 +9318,8 @@
         </p:nvSpPr>
         <p:spPr>
           <a:xfrm>
-            <a:off x="4617720" y="4288536"/>
-            <a:ext cx="2194560" cy="0"/>
+            <a:off x="4297680" y="4288536"/>
+            <a:ext cx="2697480" cy="0"/>
           </a:xfrm>
           <a:prstGeom prst="line">
             <a:avLst/>
@@ -9343,8 +9343,8 @@
         </p:nvSpPr>
         <p:spPr>
           <a:xfrm>
-            <a:off x="4617720" y="4325112"/>
-            <a:ext cx="2194560" cy="219456"/>
+            <a:off x="4297680" y="4325112"/>
+            <a:ext cx="2697480" cy="219456"/>
           </a:xfrm>
           <a:prstGeom prst="rect">
             <a:avLst/>
@@ -9457,14 +9457,14 @@
               <a:buNone/>
             </a:pPr>
             <a:r>
-              <a:rPr lang="en-US" sz="1200" dirty="0">
+              <a:rPr lang="en-US" sz="1300" dirty="0">
                 <a:solidFill>
                   <a:schemeClr val="tx2"/>
                 </a:solidFill>
               </a:rPr>
               <a:t>путь, заряд, решения и гипотезы агента</a:t>
             </a:r>
-            <a:endParaRPr lang="en-US" sz="1200" dirty="0"/>
+            <a:endParaRPr lang="en-US" sz="1300" dirty="0"/>
           </a:p>
         </p:txBody>
       </p:sp>
@@ -9576,14 +9576,14 @@
               <a:buNone/>
             </a:pPr>
             <a:r>
-              <a:rPr lang="en-US" sz="1200" dirty="0">
+              <a:rPr lang="en-US" sz="1300" dirty="0">
                 <a:solidFill>
                   <a:schemeClr val="tx2"/>
                 </a:solidFill>
               </a:rPr>
-              <a:t>11 серий на одинаковых сценариях, сравнение по разностям</a:t>
-            </a:r>
-            <a:endParaRPr lang="en-US" sz="1200" dirty="0"/>
+              <a:t>11 серий на одинаковых сценариях; 0,1 с на прогон</a:t>
+            </a:r>
+            <a:endParaRPr lang="en-US" sz="1300" dirty="0"/>
           </a:p>
         </p:txBody>
       </p:sp>
@@ -9695,14 +9695,14 @@
               <a:buNone/>
             </a:pPr>
             <a:r>
-              <a:rPr lang="en-US" sz="1200" dirty="0">
+              <a:rPr lang="en-US" sz="1300" dirty="0">
                 <a:solidFill>
                   <a:schemeClr val="tx2"/>
                 </a:solidFill>
               </a:rPr>
               <a:t>графики, проигрыватель прогонов, управление показом</a:t>
             </a:r>
-            <a:endParaRPr lang="en-US" sz="1200" dirty="0"/>
+            <a:endParaRPr lang="en-US" sz="1300" dirty="0"/>
           </a:p>
         </p:txBody>
       </p:sp>
@@ -9981,7 +9981,7 @@
         <p:spPr>
           <a:xfrm>
             <a:off x="749808" y="2971800"/>
-            <a:ext cx="2199132" cy="777240"/>
+            <a:ext cx="2199132" cy="804672"/>
           </a:xfrm>
           <a:prstGeom prst="rect">
             <a:avLst/>
@@ -9997,14 +9997,14 @@
               <a:buNone/>
             </a:pPr>
             <a:r>
-              <a:rPr lang="en-US" sz="1300" dirty="0">
+              <a:rPr lang="en-US" sz="1400" dirty="0">
                 <a:solidFill>
                   <a:schemeClr val="tx2"/>
                 </a:solidFill>
               </a:rPr>
-              <a:t>каналы сообщений между программами робота: /scan, /odom, /cmd_vel, /did/*</a:t>
-            </a:r>
-            <a:endParaRPr lang="en-US" sz="1300" dirty="0"/>
+              <a:t>каналы сообщений между программами: /scan, /odom, /cmd_vel, /did/*</a:t>
+            </a:r>
+            <a:endParaRPr lang="en-US" sz="1400" dirty="0"/>
           </a:p>
         </p:txBody>
       </p:sp>
@@ -10113,7 +10113,7 @@
         <p:spPr>
           <a:xfrm>
             <a:off x="3579876" y="2971800"/>
-            <a:ext cx="2199132" cy="777240"/>
+            <a:ext cx="2199132" cy="804672"/>
           </a:xfrm>
           <a:prstGeom prst="rect">
             <a:avLst/>
@@ -10129,14 +10129,14 @@
               <a:buNone/>
             </a:pPr>
             <a:r>
-              <a:rPr lang="en-US" sz="1300" dirty="0">
+              <a:rPr lang="en-US" sz="1400" dirty="0">
                 <a:solidFill>
                   <a:schemeClr val="tx2"/>
                 </a:solidFill>
               </a:rPr>
-              <a:t>физика, колёса и лидар; мир и робот взяты из официальных пакетов</a:t>
-            </a:r>
-            <a:endParaRPr lang="en-US" sz="1300" dirty="0"/>
+              <a:t>физика, колёса и лидар; мир и робот из официальных пакетов</a:t>
+            </a:r>
+            <a:endParaRPr lang="en-US" sz="1400" dirty="0"/>
           </a:p>
         </p:txBody>
       </p:sp>
@@ -10245,7 +10245,7 @@
         <p:spPr>
           <a:xfrm>
             <a:off x="6409944" y="2971800"/>
-            <a:ext cx="2199132" cy="777240"/>
+            <a:ext cx="2199132" cy="804672"/>
           </a:xfrm>
           <a:prstGeom prst="rect">
             <a:avLst/>
@@ -10261,14 +10261,14 @@
               <a:buNone/>
             </a:pPr>
             <a:r>
-              <a:rPr lang="en-US" sz="1300" dirty="0">
+              <a:rPr lang="en-US" sz="1400" dirty="0">
                 <a:solidFill>
                   <a:schemeClr val="tx2"/>
                 </a:solidFill>
               </a:rPr>
               <a:t>робот: два колеса и лидар на 360°, камеры нет</a:t>
             </a:r>
-            <a:endParaRPr lang="en-US" sz="1300" dirty="0"/>
+            <a:endParaRPr lang="en-US" sz="1400" dirty="0"/>
           </a:p>
         </p:txBody>
       </p:sp>
@@ -10377,7 +10377,7 @@
         <p:spPr>
           <a:xfrm>
             <a:off x="9240012" y="2971800"/>
-            <a:ext cx="2199132" cy="777240"/>
+            <a:ext cx="2199132" cy="804672"/>
           </a:xfrm>
           <a:prstGeom prst="rect">
             <a:avLst/>
@@ -10393,14 +10393,14 @@
               <a:buNone/>
             </a:pPr>
             <a:r>
-              <a:rPr lang="en-US" sz="1300" dirty="0">
+              <a:rPr lang="en-US" sz="1400" dirty="0">
                 <a:solidFill>
                   <a:schemeClr val="tx2"/>
                 </a:solidFill>
               </a:rPr>
-              <a:t>всё окружение ставится одной командой, одинаково на Mac и Linux</a:t>
-            </a:r>
-            <a:endParaRPr lang="en-US" sz="1300" dirty="0"/>
+              <a:t>окружение ставится одной командой, одинаково на Mac и Linux</a:t>
+            </a:r>
+            <a:endParaRPr lang="en-US" sz="1400" dirty="0"/>
           </a:p>
         </p:txBody>
       </p:sp>
@@ -10509,7 +10509,7 @@
         <p:spPr>
           <a:xfrm>
             <a:off x="749808" y="5349240"/>
-            <a:ext cx="2199132" cy="777240"/>
+            <a:ext cx="2199132" cy="804672"/>
           </a:xfrm>
           <a:prstGeom prst="rect">
             <a:avLst/>
@@ -10525,14 +10525,14 @@
               <a:buNone/>
             </a:pPr>
             <a:r>
-              <a:rPr lang="en-US" sz="1300" dirty="0">
+              <a:rPr lang="en-US" sz="1400" dirty="0">
                 <a:solidFill>
                   <a:schemeClr val="tx2"/>
                 </a:solidFill>
               </a:rPr>
               <a:t>агент, судья, быстрый симулятор и статистика опытов</a:t>
             </a:r>
-            <a:endParaRPr lang="en-US" sz="1300" dirty="0"/>
+            <a:endParaRPr lang="en-US" sz="1400" dirty="0"/>
           </a:p>
         </p:txBody>
       </p:sp>
@@ -10641,7 +10641,7 @@
         <p:spPr>
           <a:xfrm>
             <a:off x="3579876" y="5349240"/>
-            <a:ext cx="2199132" cy="777240"/>
+            <a:ext cx="2199132" cy="804672"/>
           </a:xfrm>
           <a:prstGeom prst="rect">
             <a:avLst/>
@@ -10657,14 +10657,14 @@
               <a:buNone/>
             </a:pPr>
             <a:r>
-              <a:rPr lang="en-US" sz="1300" dirty="0">
+              <a:rPr lang="en-US" sz="1400" dirty="0">
                 <a:solidFill>
                   <a:schemeClr val="tx2"/>
                 </a:solidFill>
               </a:rPr>
               <a:t>выбирает подцели; ответ проверяется, при сбое решает запасное правило</a:t>
             </a:r>
-            <a:endParaRPr lang="en-US" sz="1300" dirty="0"/>
+            <a:endParaRPr lang="en-US" sz="1400" dirty="0"/>
           </a:p>
         </p:txBody>
       </p:sp>
@@ -10773,7 +10773,7 @@
         <p:spPr>
           <a:xfrm>
             <a:off x="6409944" y="5349240"/>
-            <a:ext cx="2199132" cy="777240"/>
+            <a:ext cx="2199132" cy="804672"/>
           </a:xfrm>
           <a:prstGeom prst="rect">
             <a:avLst/>
@@ -10789,14 +10789,14 @@
               <a:buNone/>
             </a:pPr>
             <a:r>
-              <a:rPr lang="en-US" sz="1300" dirty="0">
+              <a:rPr lang="en-US" sz="1400" dirty="0">
                 <a:solidFill>
                   <a:schemeClr val="tx2"/>
                 </a:solidFill>
               </a:rPr>
               <a:t>графики опытов, проигрыватель прогонов и пульт в браузере</a:t>
             </a:r>
-            <a:endParaRPr lang="en-US" sz="1300" dirty="0"/>
+            <a:endParaRPr lang="en-US" sz="1400" dirty="0"/>
           </a:p>
         </p:txBody>
       </p:sp>
@@ -10905,7 +10905,7 @@
         <p:spPr>
           <a:xfrm>
             <a:off x="9240012" y="5349240"/>
-            <a:ext cx="2199132" cy="777240"/>
+            <a:ext cx="2199132" cy="804672"/>
           </a:xfrm>
           <a:prstGeom prst="rect">
             <a:avLst/>
@@ -10921,14 +10921,14 @@
               <a:buNone/>
             </a:pPr>
             <a:r>
-              <a:rPr lang="en-US" sz="1300" dirty="0">
+              <a:rPr lang="en-US" sz="1400" dirty="0">
                 <a:solidFill>
                   <a:schemeClr val="tx2"/>
                 </a:solidFill>
               </a:rPr>
               <a:t>265 автоматических проверок; запуск одной командой</a:t>
             </a:r>
-            <a:endParaRPr lang="en-US" sz="1300" dirty="0"/>
+            <a:endParaRPr lang="en-US" sz="1400" dirty="0"/>
           </a:p>
         </p:txBody>
       </p:sp>
@@ -11292,7 +11292,7 @@
                   <a:schemeClr val="tx2"/>
                 </a:solidFill>
               </a:rPr>
-              <a:t>счётчик пути колёс и поправка по лидару: скан совмещается с картой, ошибка 1,7–1,9 см</a:t>
+              <a:t>одометрия (счёт пути по колёсам) и поправка по лидару: скан совмещается с картой, ошибка 1,7–1,9 см</a:t>
             </a:r>
             <a:endParaRPr lang="en-US" sz="1400" dirty="0"/>
           </a:p>
@@ -11994,7 +11994,7 @@
         <p:spPr>
           <a:xfrm>
             <a:off x="1463040" y="1892808"/>
-            <a:ext cx="4572000" cy="457200"/>
+            <a:ext cx="3566160" cy="457200"/>
           </a:xfrm>
           <a:prstGeom prst="rect">
             <a:avLst/>
@@ -12023,14 +12023,86 @@
       </p:sp>
       <p:sp>
         <p:nvSpPr>
-          <p:cNvPr id="8" name="done-list-1"/>
+          <p:cNvPr id="8" name="done-stats"/>
+          <p:cNvSpPr txBox="1"/>
+          <p:nvPr/>
+        </p:nvSpPr>
+        <p:spPr>
+          <a:xfrm>
+            <a:off x="5120640" y="1819656"/>
+            <a:ext cx="1645920" cy="603504"/>
+          </a:xfrm>
+          <a:prstGeom prst="rect">
+            <a:avLst/>
+          </a:prstGeom>
+          <a:noFill/>
+          <a:ln/>
+        </p:spPr>
+        <p:txBody>
+          <a:bodyPr wrap="square" lIns="0" tIns="0" rIns="0" bIns="0" rtlCol="0" anchor="ctr"/>
+          <a:lstStyle/>
+          <a:p>
+            <a:pPr algn="r" indent="0" marL="0">
+              <a:buNone/>
+            </a:pPr>
+            <a:r>
+              <a:rPr lang="en-US" sz="1400" b="1" dirty="0">
+                <a:solidFill>
+                  <a:schemeClr val="tx1"/>
+                </a:solidFill>
+              </a:rPr>
+              <a:t>265</a:t>
+            </a:r>
+            <a:pPr algn="r" indent="0" marL="0">
+              <a:buNone/>
+            </a:pPr>
+            <a:r>
+              <a:rPr lang="en-US" sz="1400" dirty="0">
+                <a:solidFill>
+                  <a:schemeClr val="tx2"/>
+                </a:solidFill>
+              </a:rPr>
+              <a:t> проверок</a:t>
+            </a:r>
+            <a:endParaRPr lang="en-US" sz="1400" dirty="0"/>
+          </a:p>
+          <a:p>
+            <a:pPr algn="r" indent="0" marL="0">
+              <a:buNone/>
+            </a:pPr>
+            <a:r>
+              <a:rPr lang="en-US" sz="1400" b="1" dirty="0">
+                <a:solidFill>
+                  <a:schemeClr val="tx1"/>
+                </a:solidFill>
+              </a:rPr>
+              <a:t>2 586</a:t>
+            </a:r>
+            <a:pPr algn="r" indent="0" marL="0">
+              <a:buNone/>
+            </a:pPr>
+            <a:r>
+              <a:rPr lang="en-US" sz="1400" dirty="0">
+                <a:solidFill>
+                  <a:schemeClr val="tx2"/>
+                </a:solidFill>
+              </a:rPr>
+              <a:t> прогонов</a:t>
+            </a:r>
+            <a:endParaRPr lang="en-US" sz="1400" dirty="0"/>
+          </a:p>
+        </p:txBody>
+      </p:sp>
+      <p:sp>
+        <p:nvSpPr>
+          <p:cNvPr id="9" name="done-list-1"/>
           <p:cNvSpPr txBox="1"/>
           <p:nvPr/>
         </p:nvSpPr>
         <p:spPr>
           <a:xfrm>
             <a:off x="777240" y="2560320"/>
-            <a:ext cx="2926080" cy="2697480"/>
+            <a:ext cx="2926080" cy="3520440"/>
           </a:xfrm>
           <a:prstGeom prst="rect">
             <a:avLst/>
@@ -12044,123 +12116,123 @@
           <a:p>
             <a:pPr algn="l" marL="342900" indent="-342900">
               <a:spcAft>
-                <a:spcPts val="600"/>
+                <a:spcPts val="700"/>
               </a:spcAft>
               <a:buSzPct val="100000"/>
               <a:buChar char="•"/>
             </a:pPr>
             <a:r>
-              <a:rPr lang="en-US" sz="1300" dirty="0">
+              <a:rPr lang="en-US" sz="1400" dirty="0">
                 <a:solidFill>
                   <a:schemeClr val="tx1"/>
                 </a:solidFill>
               </a:rPr>
               <a:t>Мир и робот в Gazebo из официальных пакетов</a:t>
             </a:r>
-            <a:endParaRPr lang="en-US" sz="1300" dirty="0"/>
+            <a:endParaRPr lang="en-US" sz="1400" dirty="0"/>
           </a:p>
           <a:p>
             <a:pPr algn="l" marL="342900" indent="-342900">
               <a:spcAft>
-                <a:spcPts val="600"/>
+                <a:spcPts val="700"/>
               </a:spcAft>
               <a:buSzPct val="100000"/>
               <a:buChar char="•"/>
             </a:pPr>
             <a:r>
-              <a:rPr lang="en-US" sz="1300" dirty="0">
+              <a:rPr lang="en-US" sz="1400" dirty="0">
                 <a:solidFill>
                   <a:schemeClr val="tx1"/>
                 </a:solidFill>
               </a:rPr>
               <a:t>Судья и генератор сценариев трёх уровней</a:t>
             </a:r>
-            <a:endParaRPr lang="en-US" sz="1300" dirty="0"/>
+            <a:endParaRPr lang="en-US" sz="1400" dirty="0"/>
           </a:p>
           <a:p>
             <a:pPr algn="l" marL="342900" indent="-342900">
               <a:spcAft>
-                <a:spcPts val="600"/>
+                <a:spcPts val="700"/>
               </a:spcAft>
               <a:buSzPct val="100000"/>
               <a:buChar char="•"/>
             </a:pPr>
             <a:r>
-              <a:rPr lang="en-US" sz="1300" dirty="0">
+              <a:rPr lang="en-US" sz="1400" dirty="0">
                 <a:solidFill>
                   <a:schemeClr val="tx1"/>
                 </a:solidFill>
               </a:rPr>
               <a:t>Каналы /did/* из условия задачи</a:t>
             </a:r>
-            <a:endParaRPr lang="en-US" sz="1300" dirty="0"/>
+            <a:endParaRPr lang="en-US" sz="1400" dirty="0"/>
           </a:p>
           <a:p>
             <a:pPr algn="l" marL="342900" indent="-342900">
               <a:spcAft>
-                <a:spcPts val="600"/>
+                <a:spcPts val="700"/>
               </a:spcAft>
               <a:buSzPct val="100000"/>
               <a:buChar char="•"/>
             </a:pPr>
             <a:r>
-              <a:rPr lang="en-US" sz="1300" dirty="0">
+              <a:rPr lang="en-US" sz="1400" dirty="0">
                 <a:solidFill>
                   <a:schemeClr val="tx1"/>
                 </a:solidFill>
               </a:rPr>
               <a:t>Быстрый симулятор с тем же судьёй</a:t>
             </a:r>
-            <a:endParaRPr lang="en-US" sz="1300" dirty="0"/>
+            <a:endParaRPr lang="en-US" sz="1400" dirty="0"/>
           </a:p>
           <a:p>
             <a:pPr algn="l" marL="342900" indent="-342900">
               <a:spcAft>
-                <a:spcPts val="600"/>
+                <a:spcPts val="700"/>
               </a:spcAft>
               <a:buSzPct val="100000"/>
               <a:buChar char="•"/>
             </a:pPr>
             <a:r>
-              <a:rPr lang="en-US" sz="1300" dirty="0">
+              <a:rPr lang="en-US" sz="1400" dirty="0">
                 <a:solidFill>
                   <a:schemeClr val="tx1"/>
                 </a:solidFill>
               </a:rPr>
               <a:t>Навигация по сетке со стоимостями</a:t>
             </a:r>
-            <a:endParaRPr lang="en-US" sz="1300" dirty="0"/>
+            <a:endParaRPr lang="en-US" sz="1400" dirty="0"/>
           </a:p>
           <a:p>
             <a:pPr algn="l" marL="342900" indent="-342900">
               <a:spcAft>
-                <a:spcPts val="600"/>
+                <a:spcPts val="700"/>
               </a:spcAft>
               <a:buSzPct val="100000"/>
               <a:buChar char="•"/>
             </a:pPr>
             <a:r>
-              <a:rPr lang="en-US" sz="1300" dirty="0">
+              <a:rPr lang="en-US" sz="1400" dirty="0">
                 <a:solidFill>
                   <a:schemeClr val="tx1"/>
                 </a:solidFill>
               </a:rPr>
               <a:t>Поправка положения по лидару</a:t>
             </a:r>
-            <a:endParaRPr lang="en-US" sz="1300" dirty="0"/>
-          </a:p>
-        </p:txBody>
-      </p:sp>
-      <p:sp>
-        <p:nvSpPr>
-          <p:cNvPr id="9" name="done-list-2"/>
+            <a:endParaRPr lang="en-US" sz="1400" dirty="0"/>
+          </a:p>
+        </p:txBody>
+      </p:sp>
+      <p:sp>
+        <p:nvSpPr>
+          <p:cNvPr id="10" name="done-list-2"/>
           <p:cNvSpPr txBox="1"/>
           <p:nvPr/>
         </p:nvSpPr>
         <p:spPr>
           <a:xfrm>
             <a:off x="3840480" y="2560320"/>
-            <a:ext cx="2926080" cy="2697480"/>
+            <a:ext cx="2926080" cy="3520440"/>
           </a:xfrm>
           <a:prstGeom prst="rect">
             <a:avLst/>
@@ -12174,260 +12246,116 @@
           <a:p>
             <a:pPr algn="l" marL="342900" indent="-342900">
               <a:spcAft>
-                <a:spcPts val="600"/>
+                <a:spcPts val="700"/>
               </a:spcAft>
               <a:buSzPct val="100000"/>
               <a:buChar char="•"/>
             </a:pPr>
             <a:r>
-              <a:rPr lang="en-US" sz="1300" dirty="0">
+              <a:rPr lang="en-US" sz="1400" dirty="0">
                 <a:solidFill>
                   <a:schemeClr val="tx1"/>
                 </a:solidFill>
               </a:rPr>
               <a:t>Поиск образцов по карте вероятностей</a:t>
             </a:r>
-            <a:endParaRPr lang="en-US" sz="1300" dirty="0"/>
+            <a:endParaRPr lang="en-US" sz="1400" dirty="0"/>
           </a:p>
           <a:p>
             <a:pPr algn="l" marL="342900" indent="-342900">
               <a:spcAft>
-                <a:spcPts val="600"/>
+                <a:spcPts val="700"/>
               </a:spcAft>
               <a:buSzPct val="100000"/>
               <a:buChar char="•"/>
             </a:pPr>
             <a:r>
-              <a:rPr lang="en-US" sz="1300" dirty="0">
+              <a:rPr lang="en-US" sz="1400" dirty="0">
                 <a:solidFill>
                   <a:schemeClr val="tx1"/>
                 </a:solidFill>
               </a:rPr>
               <a:t>Оценка грунта по расходу, возврат по запасу заряда</a:t>
             </a:r>
-            <a:endParaRPr lang="en-US" sz="1300" dirty="0"/>
+            <a:endParaRPr lang="en-US" sz="1400" dirty="0"/>
           </a:p>
           <a:p>
             <a:pPr algn="l" marL="342900" indent="-342900">
               <a:spcAft>
-                <a:spcPts val="600"/>
+                <a:spcPts val="700"/>
               </a:spcAft>
               <a:buSzPct val="100000"/>
               <a:buChar char="•"/>
             </a:pPr>
             <a:r>
-              <a:rPr lang="en-US" sz="1300" dirty="0">
+              <a:rPr lang="en-US" sz="1400" dirty="0">
                 <a:solidFill>
                   <a:schemeClr val="tx1"/>
                 </a:solidFill>
               </a:rPr>
               <a:t>Журнал гипотез и расследования с выбором опыта</a:t>
             </a:r>
-            <a:endParaRPr lang="en-US" sz="1300" dirty="0"/>
+            <a:endParaRPr lang="en-US" sz="1400" dirty="0"/>
           </a:p>
           <a:p>
             <a:pPr algn="l" marL="342900" indent="-342900">
               <a:spcAft>
-                <a:spcPts val="600"/>
+                <a:spcPts val="700"/>
               </a:spcAft>
               <a:buSzPct val="100000"/>
               <a:buChar char="•"/>
             </a:pPr>
             <a:r>
-              <a:rPr lang="en-US" sz="1300" dirty="0">
+              <a:rPr lang="en-US" sz="1400" dirty="0">
                 <a:solidFill>
                   <a:schemeClr val="tx1"/>
                 </a:solidFill>
               </a:rPr>
               <a:t>Память между прогонами</a:t>
             </a:r>
-            <a:endParaRPr lang="en-US" sz="1300" dirty="0"/>
+            <a:endParaRPr lang="en-US" sz="1400" dirty="0"/>
           </a:p>
           <a:p>
             <a:pPr algn="l" marL="342900" indent="-342900">
               <a:spcAft>
-                <a:spcPts val="600"/>
+                <a:spcPts val="700"/>
               </a:spcAft>
               <a:buSzPct val="100000"/>
               <a:buChar char="•"/>
             </a:pPr>
             <a:r>
-              <a:rPr lang="en-US" sz="1300" dirty="0">
+              <a:rPr lang="en-US" sz="1400" dirty="0">
                 <a:solidFill>
                   <a:schemeClr val="tx1"/>
                 </a:solidFill>
               </a:rPr>
               <a:t>Планировщик на языковой модели: 97% годных планов с первого раза</a:t>
             </a:r>
-            <a:endParaRPr lang="en-US" sz="1300" dirty="0"/>
+            <a:endParaRPr lang="en-US" sz="1400" dirty="0"/>
           </a:p>
           <a:p>
             <a:pPr algn="l" marL="342900" indent="-342900">
               <a:spcAft>
-                <a:spcPts val="600"/>
+                <a:spcPts val="700"/>
               </a:spcAft>
               <a:buSzPct val="100000"/>
               <a:buChar char="•"/>
             </a:pPr>
             <a:r>
-              <a:rPr lang="en-US" sz="1300" dirty="0">
+              <a:rPr lang="en-US" sz="1400" dirty="0">
                 <a:solidFill>
                   <a:schemeClr val="tx1"/>
                 </a:solidFill>
               </a:rPr>
               <a:t>Веб-лаборатория и запуск одной командой</a:t>
             </a:r>
-            <a:endParaRPr lang="en-US" sz="1300" dirty="0"/>
-          </a:p>
-        </p:txBody>
-      </p:sp>
-      <p:sp>
-        <p:nvSpPr>
-          <p:cNvPr id="10" name="done-stat-1-value"/>
-          <p:cNvSpPr txBox="1"/>
-          <p:nvPr/>
-        </p:nvSpPr>
-        <p:spPr>
-          <a:xfrm>
-            <a:off x="777240" y="5303520"/>
-            <a:ext cx="1325880" cy="685800"/>
-          </a:xfrm>
-          <a:prstGeom prst="rect">
-            <a:avLst/>
-          </a:prstGeom>
-          <a:noFill/>
-          <a:ln/>
-        </p:spPr>
-        <p:txBody>
-          <a:bodyPr wrap="square" lIns="0" tIns="0" rIns="0" bIns="0" rtlCol="0" anchor="ctr"/>
-          <a:lstStyle/>
-          <a:p>
-            <a:pPr algn="l" indent="0" marL="0">
-              <a:buNone/>
-            </a:pPr>
-            <a:r>
-              <a:rPr lang="en-US" sz="3000" b="1" dirty="0">
-                <a:solidFill>
-                  <a:schemeClr val="tx1"/>
-                </a:solidFill>
-              </a:rPr>
-              <a:t>265</a:t>
-            </a:r>
-            <a:endParaRPr lang="en-US" sz="3000" dirty="0"/>
-          </a:p>
-        </p:txBody>
-      </p:sp>
-      <p:sp>
-        <p:nvSpPr>
-          <p:cNvPr id="11" name="done-stat-1-label"/>
-          <p:cNvSpPr txBox="1"/>
-          <p:nvPr/>
-        </p:nvSpPr>
-        <p:spPr>
-          <a:xfrm>
-            <a:off x="2148840" y="5303520"/>
-            <a:ext cx="1554480" cy="685800"/>
-          </a:xfrm>
-          <a:prstGeom prst="rect">
-            <a:avLst/>
-          </a:prstGeom>
-          <a:noFill/>
-          <a:ln/>
-        </p:spPr>
-        <p:txBody>
-          <a:bodyPr wrap="square" lIns="0" tIns="0" rIns="0" bIns="0" rtlCol="0" anchor="ctr"/>
-          <a:lstStyle/>
-          <a:p>
-            <a:pPr algn="l" indent="0" marL="0">
-              <a:buNone/>
-            </a:pPr>
-            <a:r>
-              <a:rPr lang="en-US" sz="1300" dirty="0">
-                <a:solidFill>
-                  <a:schemeClr val="tx2"/>
-                </a:solidFill>
-              </a:rPr>
-              <a:t>автоматических проверок проходят</a:t>
-            </a:r>
-            <a:endParaRPr lang="en-US" sz="1300" dirty="0"/>
-          </a:p>
-        </p:txBody>
-      </p:sp>
-      <p:sp>
-        <p:nvSpPr>
-          <p:cNvPr id="12" name="done-stat-2-value"/>
-          <p:cNvSpPr txBox="1"/>
-          <p:nvPr/>
-        </p:nvSpPr>
-        <p:spPr>
-          <a:xfrm>
-            <a:off x="3840480" y="5303520"/>
-            <a:ext cx="1325880" cy="685800"/>
-          </a:xfrm>
-          <a:prstGeom prst="rect">
-            <a:avLst/>
-          </a:prstGeom>
-          <a:noFill/>
-          <a:ln/>
-        </p:spPr>
-        <p:txBody>
-          <a:bodyPr wrap="square" lIns="0" tIns="0" rIns="0" bIns="0" rtlCol="0" anchor="ctr"/>
-          <a:lstStyle/>
-          <a:p>
-            <a:pPr algn="l" indent="0" marL="0">
-              <a:buNone/>
-            </a:pPr>
-            <a:r>
-              <a:rPr lang="en-US" sz="3000" b="1" dirty="0">
-                <a:solidFill>
-                  <a:schemeClr val="tx1"/>
-                </a:solidFill>
-              </a:rPr>
-              <a:t>2 586</a:t>
-            </a:r>
-            <a:endParaRPr lang="en-US" sz="3000" dirty="0"/>
-          </a:p>
-        </p:txBody>
-      </p:sp>
-      <p:sp>
-        <p:nvSpPr>
-          <p:cNvPr id="13" name="done-stat-2-label"/>
-          <p:cNvSpPr txBox="1"/>
-          <p:nvPr/>
-        </p:nvSpPr>
-        <p:spPr>
-          <a:xfrm>
-            <a:off x="5212080" y="5303520"/>
-            <a:ext cx="1554480" cy="685800"/>
-          </a:xfrm>
-          <a:prstGeom prst="rect">
-            <a:avLst/>
-          </a:prstGeom>
-          <a:noFill/>
-          <a:ln/>
-        </p:spPr>
-        <p:txBody>
-          <a:bodyPr wrap="square" lIns="0" tIns="0" rIns="0" bIns="0" rtlCol="0" anchor="ctr"/>
-          <a:lstStyle/>
-          <a:p>
-            <a:pPr algn="l" indent="0" marL="0">
-              <a:buNone/>
-            </a:pPr>
-            <a:r>
-              <a:rPr lang="en-US" sz="1300" dirty="0">
-                <a:solidFill>
-                  <a:schemeClr val="tx2"/>
-                </a:solidFill>
-              </a:rPr>
-              <a:t>прогонов в 11 сериях опытов</a:t>
-            </a:r>
-            <a:endParaRPr lang="en-US" sz="1300" dirty="0"/>
-          </a:p>
-        </p:txBody>
-      </p:sp>
-      <p:sp>
-        <p:nvSpPr>
-          <p:cNvPr id="14" name="wip-card"/>
+            <a:endParaRPr lang="en-US" sz="1400" dirty="0"/>
+          </a:p>
+        </p:txBody>
+      </p:sp>
+      <p:sp>
+        <p:nvSpPr>
+          <p:cNvPr id="11" name="wip-card"/>
           <p:cNvSpPr/>
           <p:nvPr/>
         </p:nvSpPr>
@@ -12449,7 +12377,7 @@
       </p:sp>
       <p:sp>
         <p:nvSpPr>
-          <p:cNvPr id="15" name="wip-badge"/>
+          <p:cNvPr id="12" name="wip-badge"/>
           <p:cNvSpPr txBox="1"/>
           <p:nvPr/>
         </p:nvSpPr>
@@ -12487,7 +12415,7 @@
       </p:sp>
       <p:sp>
         <p:nvSpPr>
-          <p:cNvPr id="16" name="wip-head"/>
+          <p:cNvPr id="13" name="wip-head"/>
           <p:cNvSpPr txBox="1"/>
           <p:nvPr/>
         </p:nvSpPr>
@@ -12523,7 +12451,7 @@
       </p:sp>
       <p:sp>
         <p:nvSpPr>
-          <p:cNvPr id="17" name="wip-list"/>
+          <p:cNvPr id="14" name="wip-list"/>
           <p:cNvSpPr txBox="1"/>
           <p:nvPr/>
         </p:nvSpPr>
@@ -12544,98 +12472,98 @@
           <a:p>
             <a:pPr algn="l" marL="342900" indent="-342900">
               <a:spcAft>
-                <a:spcPts val="400"/>
+                <a:spcPts val="300"/>
               </a:spcAft>
               <a:buSzPct val="100000"/>
               <a:buChar char="•"/>
             </a:pPr>
             <a:r>
-              <a:rPr lang="en-US" sz="1300" dirty="0">
+              <a:rPr lang="en-US" sz="1400" dirty="0">
                 <a:solidFill>
                   <a:schemeClr val="tx1"/>
                 </a:solidFill>
               </a:rPr>
               <a:t>Пульт и показ полного сценария в Gazebo</a:t>
             </a:r>
-            <a:endParaRPr lang="en-US" sz="1300" dirty="0"/>
+            <a:endParaRPr lang="en-US" sz="1400" dirty="0"/>
           </a:p>
           <a:p>
             <a:pPr algn="l" marL="342900" indent="-342900">
               <a:spcAft>
-                <a:spcPts val="400"/>
+                <a:spcPts val="300"/>
               </a:spcAft>
               <a:buSzPct val="100000"/>
               <a:buChar char="•"/>
             </a:pPr>
             <a:r>
-              <a:rPr lang="en-US" sz="1300" dirty="0">
+              <a:rPr lang="en-US" sz="1400" dirty="0">
                 <a:solidFill>
                   <a:schemeClr val="tx1"/>
                 </a:solidFill>
               </a:rPr>
               <a:t>Роли модели «автор» и «критик» в расследованиях</a:t>
             </a:r>
-            <a:endParaRPr lang="en-US" sz="1300" dirty="0"/>
+            <a:endParaRPr lang="en-US" sz="1400" dirty="0"/>
           </a:p>
           <a:p>
             <a:pPr algn="l" marL="342900" indent="-342900">
               <a:spcAft>
-                <a:spcPts val="400"/>
+                <a:spcPts val="300"/>
               </a:spcAft>
               <a:buSzPct val="100000"/>
               <a:buChar char="•"/>
             </a:pPr>
             <a:r>
-              <a:rPr lang="en-US" sz="1300" dirty="0">
+              <a:rPr lang="en-US" sz="1400" dirty="0">
                 <a:solidFill>
                   <a:schemeClr val="tx1"/>
                 </a:solidFill>
               </a:rPr>
               <a:t>Локальная модель Qwen</a:t>
             </a:r>
-            <a:endParaRPr lang="en-US" sz="1300" dirty="0"/>
+            <a:endParaRPr lang="en-US" sz="1400" dirty="0"/>
           </a:p>
           <a:p>
             <a:pPr algn="l" marL="342900" indent="-342900">
               <a:spcAft>
-                <a:spcPts val="400"/>
+                <a:spcPts val="300"/>
               </a:spcAft>
               <a:buSzPct val="100000"/>
               <a:buChar char="•"/>
             </a:pPr>
             <a:r>
-              <a:rPr lang="en-US" sz="1300" dirty="0">
+              <a:rPr lang="en-US" sz="1400" dirty="0">
                 <a:solidFill>
                   <a:schemeClr val="tx1"/>
                 </a:solidFill>
               </a:rPr>
               <a:t>Конструктор исследования</a:t>
             </a:r>
-            <a:endParaRPr lang="en-US" sz="1300" dirty="0"/>
+            <a:endParaRPr lang="en-US" sz="1400" dirty="0"/>
           </a:p>
           <a:p>
             <a:pPr algn="l" marL="342900" indent="-342900">
               <a:spcAft>
-                <a:spcPts val="400"/>
+                <a:spcPts val="300"/>
               </a:spcAft>
               <a:buSzPct val="100000"/>
               <a:buChar char="•"/>
             </a:pPr>
             <a:r>
-              <a:rPr lang="en-US" sz="1300" dirty="0">
+              <a:rPr lang="en-US" sz="1400" dirty="0">
                 <a:solidFill>
                   <a:schemeClr val="tx1"/>
                 </a:solidFill>
               </a:rPr>
               <a:t>Построение карты через SLAM (бонус)</a:t>
             </a:r>
-            <a:endParaRPr lang="en-US" sz="1300" dirty="0"/>
-          </a:p>
-        </p:txBody>
-      </p:sp>
-      <p:sp>
-        <p:nvSpPr>
-          <p:cNvPr id="18" name="open-card"/>
+            <a:endParaRPr lang="en-US" sz="1400" dirty="0"/>
+          </a:p>
+        </p:txBody>
+      </p:sp>
+      <p:sp>
+        <p:nvSpPr>
+          <p:cNvPr id="15" name="open-card"/>
           <p:cNvSpPr/>
           <p:nvPr/>
         </p:nvSpPr>
@@ -12657,7 +12585,7 @@
       </p:sp>
       <p:sp>
         <p:nvSpPr>
-          <p:cNvPr id="19" name="open-badge"/>
+          <p:cNvPr id="16" name="open-badge"/>
           <p:cNvSpPr txBox="1"/>
           <p:nvPr/>
         </p:nvSpPr>
@@ -12695,7 +12623,7 @@
       </p:sp>
       <p:sp>
         <p:nvSpPr>
-          <p:cNvPr id="20" name="open-head"/>
+          <p:cNvPr id="17" name="open-head"/>
           <p:cNvSpPr txBox="1"/>
           <p:nvPr/>
         </p:nvSpPr>
@@ -12731,7 +12659,7 @@
       </p:sp>
       <p:sp>
         <p:nvSpPr>
-          <p:cNvPr id="21" name="open-list"/>
+          <p:cNvPr id="18" name="open-list"/>
           <p:cNvSpPr txBox="1"/>
           <p:nvPr/>
         </p:nvSpPr>
@@ -13564,7 +13492,7 @@
         <p:spPr>
           <a:xfrm>
             <a:off x="6355080" y="1691640"/>
-            <a:ext cx="3337560" cy="274320"/>
+            <a:ext cx="5285232" cy="274320"/>
           </a:xfrm>
           <a:prstGeom prst="rect">
             <a:avLst/>
@@ -13585,7 +13513,7 @@
                   <a:schemeClr val="tx1"/>
                 </a:solidFill>
               </a:rPr>
-              <a:t>Возврат на базу, трудный уровень, %</a:t>
+              <a:t>Возврат на базу на трудном уровне, %</a:t>
             </a:r>
             <a:endParaRPr lang="en-US" sz="1400" dirty="0"/>
           </a:p>
@@ -13593,13 +13521,13 @@
       </p:sp>
       <p:graphicFrame>
         <p:nvGraphicFramePr>
-          <p:cNvPr id="9" name="e10-chart" descr="Возврат на базу на трудном уровне: фиксированный план, адаптивный агент, исследователь"/>
+          <p:cNvPr id="9" name="e10-chart" descr="Возврат на базу на трудном уровне: исследователь, адаптивный агент, фиксированный план"/>
           <p:cNvGraphicFramePr/>
           <p:nvPr/>
         </p:nvGraphicFramePr>
         <p:xfrm>
           <a:off x="6355080" y="1965960"/>
-          <a:ext cx="3154680" cy="3611880"/>
+          <a:ext cx="5285232" cy="2240280"/>
         </p:xfrm>
         <a:graphic xmlns:a="http://schemas.openxmlformats.org/drawingml/2006/main">
           <a:graphicData uri="http://schemas.openxmlformats.org/drawingml/2006/chart">
@@ -13615,12 +13543,12 @@
         </p:nvSpPr>
         <p:spPr>
           <a:xfrm>
-            <a:off x="9692640" y="1965960"/>
-            <a:ext cx="1947672" cy="2926080"/>
+            <a:off x="6355080" y="4343400"/>
+            <a:ext cx="5285232" cy="1188720"/>
           </a:xfrm>
           <a:prstGeom prst="roundRect">
             <a:avLst>
-              <a:gd name="adj" fmla="val 3756"/>
+              <a:gd name="adj" fmla="val 6154"/>
             </a:avLst>
           </a:prstGeom>
           <a:solidFill>
@@ -13637,8 +13565,8 @@
         </p:nvSpPr>
         <p:spPr>
           <a:xfrm>
-            <a:off x="9921240" y="2093976"/>
-            <a:ext cx="1490472" cy="539750"/>
+            <a:off x="6583680" y="4343400"/>
+            <a:ext cx="1417320" cy="1188720"/>
           </a:xfrm>
           <a:prstGeom prst="rect">
             <a:avLst/>
@@ -13654,14 +13582,14 @@
               <a:buNone/>
             </a:pPr>
             <a:r>
-              <a:rPr lang="en-US" sz="3400" b="1" dirty="0">
+              <a:rPr lang="en-US" sz="3600" b="1" dirty="0">
                 <a:solidFill>
                   <a:schemeClr val="tx1"/>
                 </a:solidFill>
               </a:rPr>
               <a:t>98%</a:t>
             </a:r>
-            <a:endParaRPr lang="en-US" sz="3400" dirty="0"/>
+            <a:endParaRPr lang="en-US" sz="3600" dirty="0"/>
           </a:p>
         </p:txBody>
       </p:sp>
@@ -13673,17 +13601,17 @@
         </p:nvSpPr>
         <p:spPr>
           <a:xfrm>
-            <a:off x="9921240" y="2670302"/>
-            <a:ext cx="1490472" cy="2130298"/>
-          </a:xfrm>
-          <a:prstGeom prst="rect">
-            <a:avLst/>
-          </a:prstGeom>
-          <a:noFill/>
-          <a:ln/>
-        </p:spPr>
-        <p:txBody>
-          <a:bodyPr wrap="square" lIns="0" tIns="0" rIns="0" bIns="0" rtlCol="0" anchor="t"/>
+            <a:off x="8046720" y="4343400"/>
+            <a:ext cx="3410712" cy="1188720"/>
+          </a:xfrm>
+          <a:prstGeom prst="rect">
+            <a:avLst/>
+          </a:prstGeom>
+          <a:noFill/>
+          <a:ln/>
+        </p:spPr>
+        <p:txBody>
+          <a:bodyPr wrap="square" lIns="0" tIns="0" rIns="0" bIns="0" rtlCol="0" anchor="ctr"/>
           <a:lstStyle/>
           <a:p>
             <a:pPr algn="l" indent="0" marL="0">

--- a/presentation/checkpoint2.pptx
+++ b/presentation/checkpoint2.pptx
@@ -117,7 +117,7 @@
   <p:extLst>
     <p:ext uri="{521415D9-36F7-43E2-AB2F-B90AF26B5E84}">
       <p14:sectionLst xmlns:p14="http://schemas.microsoft.com/office/powerpoint/2010/main">
-        <p14:section name="Задача и решение" id="{530b4ade-05f2-97be-78f4-0cb911beafaf}">
+        <p14:section name="Задача и решение" id="{ffc423c9-045e-2db5-2683-071689ab6743}">
           <p14:sldIdLst>
             <p14:sldId id="256"/>
             <p14:sldId id="257"/>
@@ -127,7 +127,7 @@
             <p14:sldId id="261"/>
           </p14:sldIdLst>
         </p14:section>
-        <p14:section name="Состояние и результаты" id="{c16c1246-384f-b744-684f-5d54b4b96348}">
+        <p14:section name="Состояние и результаты" id="{aa10e5a8-20c3-dc71-723d-78b165dee8cf}">
           <p14:sldIdLst>
             <p14:sldId id="262"/>
             <p14:sldId id="263"/>
@@ -135,7 +135,7 @@
             <p14:sldId id="265"/>
           </p14:sldIdLst>
         </p14:section>
-        <p14:section name="Как работали" id="{725cb4bd-dd06-a0bf-b906-9ac2de7c0e57}">
+        <p14:section name="Как работали" id="{a79008ae-9b8b-7c95-b6fa-a1c7450e3f3f}">
           <p14:sldIdLst>
             <p14:sldId id="266"/>
           </p14:sldIdLst>
@@ -2360,7 +2360,7 @@
           <a:p>
             <a:r>
               <a:rPr lang="en-US" dirty="0"/>
-              <a:t>Робот стартует с базы и слушает датчик близости: каждое показание уточняет карту вероятностей, синее на кадрах. Когда место становится уверенным, он подъезжает и собирает образец. Если что-то идёт не так — штраф, лишний расход, шум датчика, — он записывает гипотезу и проверяет её: в этом прогоне гипотез 14, подтверждено 8. Заряд на дорогу домой он считает сам и возвращается на базу. ЗДЕСЬ — ЖИВОЙ ПОКАЗ: открыть пульт, щёлкнуть точку на карте, показать, как робот едет в Gazebo и как строится карта (около минуты).</a:t>
+              <a:t>Полный сценарий — пять шагов: запуск, карта, задача, движение, результат. Одна команда поднимает мир, робота, судью и пульт. Робот ещё стоит, а лидар уже строит карту: видно 36 процентов пола. Задачу можно дать щелчком по карте — точку или маршрут — либо запустить миссию, и тогда робот сам ищет образцы. На кадрах настоящая миссия в Gazebo на трудном уровне: собрано 5 из 7, робот вернулся на базу. По дороге он получил штраф, заметил сбой датчика и записал гипотезы: всего 14, подтверждено 8. ЗДЕСЬ — ЖИВОЙ ПОКАЗ (docs/demo_script.md): пульт уже открыт; показать карту из одной точки, поставить маршрут из пяти-шести точек, нажать «Ехать», затем «Домой» и «Запустить миссию». Полный сценарий показа идёт около пяти минут — для короткой защиты хватит маршрута и начала миссии, итог миссии есть на слайде.</a:t>
             </a:r>
             <a:endParaRPr lang="en-US" dirty="0"/>
           </a:p>
@@ -2712,7 +2712,7 @@
           <a:p>
             <a:r>
               <a:rPr lang="en-US" dirty="0"/>
-              <a:t>Слева то, что уже работает и проверено: стенд, навигация, поиск образцов, журнал гипотез, расследования, память и планировщик на языковой модели. Это подтверждают 265 автоматических проверок и 2 586 прогонов в 11 сериях опытов. В работе — пульт и показ полного сценария в Gazebo, роли модели в расследованиях, локальная модель и конструктор исследования. И честно о нерешённом: адаптация к изменениям среды пока не прибавляет очков, а правила судьи — наши допущения.</a:t>
+              <a:t>Слева то, что уже работает и проверено: стенд, навигация, поиск образцов, журнал гипотез, расследования, память и планировщик на языковой модели. Это подтверждают 265 автоматических проверок и 2 622 прогонов в 12 сериях опытов. В работе — пульт и показ полного сценария в Gazebo, роли модели в расследованиях, локальная модель и конструктор исследования. И честно о нерешённом: адаптация к изменениям среды пока не прибавляет очков, а правила судьи — наши допущения.</a:t>
             </a:r>
             <a:endParaRPr lang="en-US" dirty="0"/>
           </a:p>
@@ -7205,7 +7205,7 @@
                   <a:schemeClr val="accent5"/>
                 </a:solidFill>
               </a:rPr>
-              <a:t>Один настоящий прогон в Gazebo на трудном уровне: собрано 5 из 7, робот вернулся на базу</a:t>
+              <a:t>Полный сценарий одной командой: запуск → карта → задача → движение → результат</a:t>
             </a:r>
             <a:endParaRPr lang="en-US" sz="1600" dirty="0"/>
           </a:p>
@@ -7274,14 +7274,14 @@
               <a:buNone/>
             </a:pPr>
             <a:r>
-              <a:rPr lang="en-US" sz="1500" b="1" dirty="0">
+              <a:rPr lang="en-US" sz="1600" b="1" dirty="0">
                 <a:solidFill>
                   <a:schemeClr val="tx1"/>
                 </a:solidFill>
               </a:rPr>
-              <a:t>Старт</a:t>
-            </a:r>
-            <a:endParaRPr lang="en-US" sz="1500" dirty="0"/>
+              <a:t>Запуск</a:t>
+            </a:r>
+            <a:endParaRPr lang="en-US" sz="1600" dirty="0"/>
           </a:p>
         </p:txBody>
       </p:sp>
@@ -7315,7 +7315,7 @@
                   <a:schemeClr val="tx2"/>
                 </a:solidFill>
               </a:rPr>
-              <a:t>база, заряд 60; стены известны, образцы — нет</a:t>
+              <a:t>одна команда поднимает мир, робота, судью и пульт</a:t>
             </a:r>
             <a:endParaRPr lang="en-US" sz="1300" dirty="0"/>
           </a:p>
@@ -7384,14 +7384,14 @@
               <a:buNone/>
             </a:pPr>
             <a:r>
-              <a:rPr lang="en-US" sz="1500" b="1" dirty="0">
+              <a:rPr lang="en-US" sz="1600" b="1" dirty="0">
                 <a:solidFill>
                   <a:schemeClr val="tx1"/>
                 </a:solidFill>
               </a:rPr>
-              <a:t>Поиск</a:t>
-            </a:r>
-            <a:endParaRPr lang="en-US" sz="1500" dirty="0"/>
+              <a:t>Карта</a:t>
+            </a:r>
+            <a:endParaRPr lang="en-US" sz="1600" dirty="0"/>
           </a:p>
         </p:txBody>
       </p:sp>
@@ -7425,7 +7425,7 @@
                   <a:schemeClr val="tx2"/>
                 </a:solidFill>
               </a:rPr>
-              <a:t>слушает датчик, уточняет карту вероятностей</a:t>
+              <a:t>робот ещё стоит, а лидар уже видит 36% пола</a:t>
             </a:r>
             <a:endParaRPr lang="en-US" sz="1300" dirty="0"/>
           </a:p>
@@ -7494,14 +7494,14 @@
               <a:buNone/>
             </a:pPr>
             <a:r>
-              <a:rPr lang="en-US" sz="1500" b="1" dirty="0">
+              <a:rPr lang="en-US" sz="1600" b="1" dirty="0">
                 <a:solidFill>
                   <a:schemeClr val="tx1"/>
                 </a:solidFill>
               </a:rPr>
-              <a:t>Сбор</a:t>
-            </a:r>
-            <a:endParaRPr lang="en-US" sz="1500" dirty="0"/>
+              <a:t>Задача</a:t>
+            </a:r>
+            <a:endParaRPr lang="en-US" sz="1600" dirty="0"/>
           </a:p>
         </p:txBody>
       </p:sp>
@@ -7535,7 +7535,7 @@
                   <a:schemeClr val="tx2"/>
                 </a:solidFill>
               </a:rPr>
-              <a:t>подъезжает ближе 30 см и забирает образец</a:t>
+              <a:t>точка или маршрут щелчком по карте — или миссия: собрать образцы</a:t>
             </a:r>
             <a:endParaRPr lang="en-US" sz="1300" dirty="0"/>
           </a:p>
@@ -7604,14 +7604,14 @@
               <a:buNone/>
             </a:pPr>
             <a:r>
-              <a:rPr lang="en-US" sz="1500" b="1" dirty="0">
+              <a:rPr lang="en-US" sz="1600" b="1" dirty="0">
                 <a:solidFill>
                   <a:schemeClr val="tx1"/>
                 </a:solidFill>
               </a:rPr>
-              <a:t>Проверка гипотез</a:t>
-            </a:r>
-            <a:endParaRPr lang="en-US" sz="1500" dirty="0"/>
+              <a:t>Движение</a:t>
+            </a:r>
+            <a:endParaRPr lang="en-US" sz="1600" dirty="0"/>
           </a:p>
         </p:txBody>
       </p:sp>
@@ -7645,7 +7645,7 @@
                   <a:schemeClr val="tx2"/>
                 </a:solidFill>
               </a:rPr>
-              <a:t>штраф, расход, шум: причина ищется опытом</a:t>
+              <a:t>путь в обход столбов; положение поправляется по лидару</a:t>
             </a:r>
             <a:endParaRPr lang="en-US" sz="1300" dirty="0"/>
           </a:p>
@@ -7714,14 +7714,14 @@
               <a:buNone/>
             </a:pPr>
             <a:r>
-              <a:rPr lang="en-US" sz="1500" b="1" dirty="0">
+              <a:rPr lang="en-US" sz="1600" b="1" dirty="0">
                 <a:solidFill>
                   <a:schemeClr val="tx1"/>
                 </a:solidFill>
               </a:rPr>
-              <a:t>Возврат</a:t>
-            </a:r>
-            <a:endParaRPr lang="en-US" sz="1500" dirty="0"/>
+              <a:t>Результат</a:t>
+            </a:r>
+            <a:endParaRPr lang="en-US" sz="1600" dirty="0"/>
           </a:p>
         </p:txBody>
       </p:sp>
@@ -7755,7 +7755,7 @@
                   <a:schemeClr val="tx2"/>
                 </a:solidFill>
               </a:rPr>
-              <a:t>считает заряд на дорогу и едет на базу</a:t>
+              <a:t>образцы собраны, робот на базе; счёт судьи и журнал гипотез</a:t>
             </a:r>
             <a:endParaRPr lang="en-US" sz="1300" dirty="0"/>
           </a:p>
@@ -7777,8 +7777,8 @@
         </p:blipFill>
         <p:spPr>
           <a:xfrm>
-            <a:off x="548640" y="2761488"/>
-            <a:ext cx="2331720" cy="2233788"/>
+            <a:off x="548640" y="2724912"/>
+            <a:ext cx="2619756" cy="2509726"/>
           </a:xfrm>
           <a:prstGeom prst="rect">
             <a:avLst/>
@@ -7793,8 +7793,8 @@
         </p:nvSpPr>
         <p:spPr>
           <a:xfrm>
-            <a:off x="411480" y="5031852"/>
-            <a:ext cx="2606040" cy="256032"/>
+            <a:off x="411480" y="5271214"/>
+            <a:ext cx="2894076" cy="256032"/>
           </a:xfrm>
           <a:prstGeom prst="rect">
             <a:avLst/>
@@ -7815,7 +7815,7 @@
                   <a:schemeClr val="tx1"/>
                 </a:solidFill>
               </a:rPr>
-              <a:t>5 с · заряд 58 · собрано 0 из 7</a:t>
+              <a:t>37 с · заряд 58 · собрано 0 из 7</a:t>
             </a:r>
             <a:endParaRPr lang="en-US" sz="1300" dirty="0"/>
           </a:p>
@@ -7829,8 +7829,8 @@
         </p:nvSpPr>
         <p:spPr>
           <a:xfrm>
-            <a:off x="411480" y="5306172"/>
-            <a:ext cx="2606040" cy="530352"/>
+            <a:off x="411480" y="5545534"/>
+            <a:ext cx="2894076" cy="457200"/>
           </a:xfrm>
           <a:prstGeom prst="rect">
             <a:avLst/>
@@ -7859,7 +7859,7 @@
       </p:sp>
       <p:pic>
         <p:nvPicPr>
-          <p:cNvPr id="23" name="frame-2" descr="Кадр прогона: сбор и штраф">    </p:cNvPr>
+          <p:cNvPr id="23" name="frame-4" descr="Кадр прогона: возврат">    </p:cNvPr>
           <p:cNvPicPr>
             <a:picLocks noChangeAspect="1"/>
           </p:cNvPicPr>
@@ -7873,8 +7873,8 @@
         </p:blipFill>
         <p:spPr>
           <a:xfrm>
-            <a:off x="3468624" y="2761488"/>
-            <a:ext cx="2331720" cy="2233788"/>
+            <a:off x="9020556" y="2724912"/>
+            <a:ext cx="2619756" cy="2509726"/>
           </a:xfrm>
           <a:prstGeom prst="rect">
             <a:avLst/>
@@ -7883,14 +7883,14 @@
       </p:pic>
       <p:sp>
         <p:nvSpPr>
-          <p:cNvPr id="24" name="frame-2-state"/>
-          <p:cNvSpPr txBox="1"/>
-          <p:nvPr/>
-        </p:nvSpPr>
-        <p:spPr>
-          <a:xfrm>
-            <a:off x="3331464" y="5031852"/>
-            <a:ext cx="2606040" cy="256032"/>
+          <p:cNvPr id="24" name="frame-4-state"/>
+          <p:cNvSpPr txBox="1"/>
+          <p:nvPr/>
+        </p:nvSpPr>
+        <p:spPr>
+          <a:xfrm>
+            <a:off x="8883396" y="5271214"/>
+            <a:ext cx="2894076" cy="256032"/>
           </a:xfrm>
           <a:prstGeom prst="rect">
             <a:avLst/>
@@ -7911,7 +7911,7 @@
                   <a:schemeClr val="tx1"/>
                 </a:solidFill>
               </a:rPr>
-              <a:t>27 с · заряд 45 · собрано 2 из 7</a:t>
+              <a:t>129 с · заряд 8 · собрано 5 из 7</a:t>
             </a:r>
             <a:endParaRPr lang="en-US" sz="1300" dirty="0"/>
           </a:p>
@@ -7919,14 +7919,14 @@
       </p:sp>
       <p:sp>
         <p:nvSpPr>
-          <p:cNvPr id="25" name="frame-2-quote"/>
-          <p:cNvSpPr txBox="1"/>
-          <p:nvPr/>
-        </p:nvSpPr>
-        <p:spPr>
-          <a:xfrm>
-            <a:off x="3331464" y="5306172"/>
-            <a:ext cx="2606040" cy="530352"/>
+          <p:cNvPr id="25" name="frame-4-quote"/>
+          <p:cNvSpPr txBox="1"/>
+          <p:nvPr/>
+        </p:nvSpPr>
+        <p:spPr>
+          <a:xfrm>
+            <a:off x="8883396" y="5545534"/>
+            <a:ext cx="2894076" cy="457200"/>
           </a:xfrm>
           <a:prstGeom prst="rect">
             <a:avLst/>
@@ -7947,7 +7947,7 @@
                   <a:schemeClr val="tx2"/>
                 </a:solidFill>
               </a:rPr>
-              <a:t>Журнал: «H6: около (0,2; −2,0) опасная зона радиусом около 0,5 м»</a:t>
+              <a:t>Журнал: «Финиш: возврат на базу засчитан. Собрано 5 из 7»</a:t>
             </a:r>
             <a:endParaRPr lang="en-US" sz="1100" dirty="0"/>
           </a:p>
@@ -7955,7 +7955,7 @@
       </p:sp>
       <p:pic>
         <p:nvPicPr>
-          <p:cNvPr id="26" name="frame-3" descr="Кадр прогона: сбой датчика">    </p:cNvPr>
+          <p:cNvPr id="26" name="scenario-shot" descr="Веб-лаборатория: тот же прогон в проигрывателе, 75 с — карта, графики, журнал гипотез">    </p:cNvPr>
           <p:cNvPicPr>
             <a:picLocks noChangeAspect="1"/>
           </p:cNvPicPr>
@@ -7969,8 +7969,8 @@
         </p:blipFill>
         <p:spPr>
           <a:xfrm>
-            <a:off x="6388608" y="2761488"/>
-            <a:ext cx="2331720" cy="2233788"/>
+            <a:off x="3500905" y="2724912"/>
+            <a:ext cx="5187142" cy="2926080"/>
           </a:xfrm>
           <a:prstGeom prst="rect">
             <a:avLst/>
@@ -7979,14 +7979,14 @@
       </p:pic>
       <p:sp>
         <p:nvSpPr>
-          <p:cNvPr id="27" name="frame-3-state"/>
-          <p:cNvSpPr txBox="1"/>
-          <p:nvPr/>
-        </p:nvSpPr>
-        <p:spPr>
-          <a:xfrm>
-            <a:off x="6251448" y="5031852"/>
-            <a:ext cx="2606040" cy="256032"/>
+          <p:cNvPr id="27" name="scenario-shot-caption"/>
+          <p:cNvSpPr txBox="1"/>
+          <p:nvPr/>
+        </p:nvSpPr>
+        <p:spPr>
+          <a:xfrm>
+            <a:off x="3396996" y="5696712"/>
+            <a:ext cx="5394960" cy="237744"/>
           </a:xfrm>
           <a:prstGeom prst="rect">
             <a:avLst/>
@@ -8002,36 +8002,36 @@
               <a:buNone/>
             </a:pPr>
             <a:r>
-              <a:rPr lang="en-US" sz="1300" b="1" dirty="0">
-                <a:solidFill>
-                  <a:schemeClr val="tx1"/>
-                </a:solidFill>
-              </a:rPr>
-              <a:t>35 с · заряд 39 · собрано 2 из 7</a:t>
-            </a:r>
-            <a:endParaRPr lang="en-US" sz="1300" dirty="0"/>
-          </a:p>
-        </p:txBody>
-      </p:sp>
-      <p:sp>
-        <p:nvSpPr>
-          <p:cNvPr id="28" name="frame-3-quote"/>
-          <p:cNvSpPr txBox="1"/>
-          <p:nvPr/>
-        </p:nvSpPr>
-        <p:spPr>
-          <a:xfrm>
-            <a:off x="6251448" y="5306172"/>
-            <a:ext cx="2606040" cy="530352"/>
-          </a:xfrm>
-          <a:prstGeom prst="rect">
-            <a:avLst/>
-          </a:prstGeom>
-          <a:noFill/>
-          <a:ln/>
-        </p:spPr>
-        <p:txBody>
-          <a:bodyPr wrap="square" lIns="0" tIns="0" rIns="0" bIns="0" rtlCol="0" anchor="t"/>
+              <a:rPr lang="en-US" sz="1200" dirty="0">
+                <a:solidFill>
+                  <a:schemeClr val="tx2"/>
+                </a:solidFill>
+              </a:rPr>
+              <a:t>Веб-лаборатория: тот же прогон в проигрывателе, 75 с — карта, графики, журнал гипотез</a:t>
+            </a:r>
+            <a:endParaRPr lang="en-US" sz="1200" dirty="0"/>
+          </a:p>
+        </p:txBody>
+      </p:sp>
+      <p:sp>
+        <p:nvSpPr>
+          <p:cNvPr id="28" name="frames-legend"/>
+          <p:cNvSpPr txBox="1"/>
+          <p:nvPr/>
+        </p:nvSpPr>
+        <p:spPr>
+          <a:xfrm>
+            <a:off x="548640" y="5980176"/>
+            <a:ext cx="11091672" cy="237744"/>
+          </a:xfrm>
+          <a:prstGeom prst="rect">
+            <a:avLst/>
+          </a:prstGeom>
+          <a:noFill/>
+          <a:ln/>
+        </p:spPr>
+        <p:txBody>
+          <a:bodyPr wrap="square" lIns="0" tIns="0" rIns="0" bIns="0" rtlCol="0" anchor="ctr"/>
           <a:lstStyle/>
           <a:p>
             <a:pPr algn="ctr" indent="0" marL="0">
@@ -8040,142 +8040,10 @@
             <a:r>
               <a:rPr lang="en-US" sz="1100" dirty="0">
                 <a:solidFill>
-                  <a:schemeClr val="tx2"/>
-                </a:solidFill>
-              </a:rPr>
-              <a:t>Журнал: «H8: датчик образцов неисправен»</a:t>
-            </a:r>
-            <a:endParaRPr lang="en-US" sz="1100" dirty="0"/>
-          </a:p>
-        </p:txBody>
-      </p:sp>
-      <p:pic>
-        <p:nvPicPr>
-          <p:cNvPr id="29" name="frame-4" descr="Кадр прогона: возврат">    </p:cNvPr>
-          <p:cNvPicPr>
-            <a:picLocks noChangeAspect="1"/>
-          </p:cNvPicPr>
-          <p:nvPr/>
-        </p:nvPicPr>
-        <p:blipFill>
-          <a:blip r:embed="rId4"/>
-          <a:stretch>
-            <a:fillRect/>
-          </a:stretch>
-        </p:blipFill>
-        <p:spPr>
-          <a:xfrm>
-            <a:off x="9308592" y="2761488"/>
-            <a:ext cx="2331720" cy="2233788"/>
-          </a:xfrm>
-          <a:prstGeom prst="rect">
-            <a:avLst/>
-          </a:prstGeom>
-        </p:spPr>
-      </p:pic>
-      <p:sp>
-        <p:nvSpPr>
-          <p:cNvPr id="30" name="frame-4-state"/>
-          <p:cNvSpPr txBox="1"/>
-          <p:nvPr/>
-        </p:nvSpPr>
-        <p:spPr>
-          <a:xfrm>
-            <a:off x="9171432" y="5031852"/>
-            <a:ext cx="2606040" cy="256032"/>
-          </a:xfrm>
-          <a:prstGeom prst="rect">
-            <a:avLst/>
-          </a:prstGeom>
-          <a:noFill/>
-          <a:ln/>
-        </p:spPr>
-        <p:txBody>
-          <a:bodyPr wrap="square" lIns="0" tIns="0" rIns="0" bIns="0" rtlCol="0" anchor="ctr"/>
-          <a:lstStyle/>
-          <a:p>
-            <a:pPr algn="ctr" indent="0" marL="0">
-              <a:buNone/>
-            </a:pPr>
-            <a:r>
-              <a:rPr lang="en-US" sz="1300" b="1" dirty="0">
-                <a:solidFill>
-                  <a:schemeClr val="tx1"/>
-                </a:solidFill>
-              </a:rPr>
-              <a:t>98 с · заряд 8 · собрано 5 из 7</a:t>
-            </a:r>
-            <a:endParaRPr lang="en-US" sz="1300" dirty="0"/>
-          </a:p>
-        </p:txBody>
-      </p:sp>
-      <p:sp>
-        <p:nvSpPr>
-          <p:cNvPr id="31" name="frame-4-quote"/>
-          <p:cNvSpPr txBox="1"/>
-          <p:nvPr/>
-        </p:nvSpPr>
-        <p:spPr>
-          <a:xfrm>
-            <a:off x="9171432" y="5306172"/>
-            <a:ext cx="2606040" cy="530352"/>
-          </a:xfrm>
-          <a:prstGeom prst="rect">
-            <a:avLst/>
-          </a:prstGeom>
-          <a:noFill/>
-          <a:ln/>
-        </p:spPr>
-        <p:txBody>
-          <a:bodyPr wrap="square" lIns="0" tIns="0" rIns="0" bIns="0" rtlCol="0" anchor="t"/>
-          <a:lstStyle/>
-          <a:p>
-            <a:pPr algn="ctr" indent="0" marL="0">
-              <a:buNone/>
-            </a:pPr>
-            <a:r>
-              <a:rPr lang="en-US" sz="1100" dirty="0">
-                <a:solidFill>
-                  <a:schemeClr val="tx2"/>
-                </a:solidFill>
-              </a:rPr>
-              <a:t>Журнал: «Финиш: возврат на базу засчитан. Собрано 5 из 7»</a:t>
-            </a:r>
-            <a:endParaRPr lang="en-US" sz="1100" dirty="0"/>
-          </a:p>
-        </p:txBody>
-      </p:sp>
-      <p:sp>
-        <p:nvSpPr>
-          <p:cNvPr id="32" name="frames-legend"/>
-          <p:cNvSpPr txBox="1"/>
-          <p:nvPr/>
-        </p:nvSpPr>
-        <p:spPr>
-          <a:xfrm>
-            <a:off x="548640" y="5961888"/>
-            <a:ext cx="11091672" cy="256032"/>
-          </a:xfrm>
-          <a:prstGeom prst="rect">
-            <a:avLst/>
-          </a:prstGeom>
-          <a:noFill/>
-          <a:ln/>
-        </p:spPr>
-        <p:txBody>
-          <a:bodyPr wrap="square" lIns="0" tIns="0" rIns="0" bIns="0" rtlCol="0" anchor="ctr"/>
-          <a:lstStyle/>
-          <a:p>
-            <a:pPr algn="ctr" indent="0" marL="0">
-              <a:buNone/>
-            </a:pPr>
-            <a:r>
-              <a:rPr lang="en-US" sz="1100" dirty="0">
-                <a:solidFill>
                   <a:schemeClr val="accent5"/>
                 </a:solidFill>
               </a:rPr>
-              <a:t>Синее — где агент ждёт образец · жёлтые кольца — где образцы на самом деле · зелёные — собраны · красное — штраф и опасная зона в памяти агента</a:t>
+              <a:t>Кадры — настоящая миссия в Gazebo на трудном уровне: собрано 5 из 7, робот вернулся на базу. Синее — где агент ждёт образец, жёлтые кольца — где образцы на самом деле, зелёное — собрано, красное — штраф.</a:t>
             </a:r>
             <a:endParaRPr lang="en-US" sz="1100" dirty="0"/>
           </a:p>
@@ -9581,7 +9449,7 @@
                   <a:schemeClr val="tx2"/>
                 </a:solidFill>
               </a:rPr>
-              <a:t>11 серий на одинаковых сценариях; 0,1 с на прогон</a:t>
+              <a:t>12 серий на одинаковых сценариях; 0,1 с на прогон</a:t>
             </a:r>
             <a:endParaRPr lang="en-US" sz="1300" dirty="0"/>
           </a:p>
@@ -11677,7 +11545,7 @@
                   <a:schemeClr val="accent5"/>
                 </a:solidFill>
               </a:rPr>
-              <a:t>по 88 сканам лидара в Gazebo; увидено 99,9% пола, оранжевое — путь робота</a:t>
+              <a:t>по 88 сканам из записи прогона в Gazebo; увидено 99,9% пола, оранжевое — путь робота</a:t>
             </a:r>
             <a:endParaRPr lang="en-US" sz="1200" dirty="0"/>
           </a:p>
@@ -12076,7 +11944,7 @@
                   <a:schemeClr val="tx1"/>
                 </a:solidFill>
               </a:rPr>
-              <a:t>2 586</a:t>
+              <a:t>2 622</a:t>
             </a:r>
             <a:pPr algn="r" indent="0" marL="0">
               <a:buNone/>

--- a/presentation/checkpoint2.pptx
+++ b/presentation/checkpoint2.pptx
@@ -117,7 +117,7 @@
   <p:extLst>
     <p:ext uri="{521415D9-36F7-43E2-AB2F-B90AF26B5E84}">
       <p14:sectionLst xmlns:p14="http://schemas.microsoft.com/office/powerpoint/2010/main">
-        <p14:section name="Задача и решение" id="{ffc423c9-045e-2db5-2683-071689ab6743}">
+        <p14:section name="Задача и решение" id="{4bb42933-116e-6856-4071-b1ef5da232af}">
           <p14:sldIdLst>
             <p14:sldId id="256"/>
             <p14:sldId id="257"/>
@@ -127,7 +127,7 @@
             <p14:sldId id="261"/>
           </p14:sldIdLst>
         </p14:section>
-        <p14:section name="Состояние и результаты" id="{aa10e5a8-20c3-dc71-723d-78b165dee8cf}">
+        <p14:section name="Состояние и результаты" id="{16c1ea71-7f86-09d3-da75-72d566b4d774}">
           <p14:sldIdLst>
             <p14:sldId id="262"/>
             <p14:sldId id="263"/>
@@ -135,7 +135,7 @@
             <p14:sldId id="265"/>
           </p14:sldIdLst>
         </p14:section>
-        <p14:section name="Как работали" id="{a79008ae-9b8b-7c95-b6fa-a1c7450e3f3f}">
+        <p14:section name="Как работали" id="{090cd1f5-e351-4453-5b73-4339afd196ab}">
           <p14:sldIdLst>
             <p14:sldId id="266"/>
           </p14:sldIdLst>
@@ -890,7 +890,7 @@
                 <c:formatCode>General</c:formatCode>
                 <c:ptCount val="3"/>
                 <c:pt idx="0">
-                  <c:v>97.5</c:v>
+                  <c:v>100</c:v>
                 </c:pt>
                 <c:pt idx="1">
                   <c:v>87.5</c:v>
@@ -2096,7 +2096,7 @@
           <a:p>
             <a:r>
               <a:rPr lang="en-US" dirty="0"/>
-              <a:t>Серии считаются в быстром симуляторе, поэтому мы проверили перенос в Gazebo с настоящей физикой. Сначала одометрия, то есть счёт пути по колёсам, уходила больше чем на метр. Причину нашли: первые тридцать секунд после появления в мире робот покачивается, и манёвры в это время сбивают одометрию. Теперь агент ждёт и сверяет положение с лидаром: ошибка около двух сантиметров, максимум 4,8. Лёгкий и средний уровни совпали с быстрым симулятором полностью, на трудном собрано 5 образцов против 6.</a:t>
+              <a:t>Серии считаются в быстром симуляторе, поэтому мы проверили перенос в Gazebo с настоящей физикой. Сначала одометрия, то есть счёт пути по колёсам, уходила больше чем на метр. Причину нашли: первые тридцать секунд после появления в мире робот покачивается, и манёвры в это время сбивают одометрию. Теперь агент ждёт и сверяет положение с лидаром: ошибка около двух сантиметров, максимум 4,8. Уровни easy и medium совпали с быстрым симулятором полностью, на hard собрано 5 против 6.</a:t>
             </a:r>
             <a:endParaRPr lang="en-US" dirty="0"/>
           </a:p>
@@ -2184,7 +2184,7 @@
           <a:p>
             <a:r>
               <a:rPr lang="en-US" dirty="0"/>
-              <a:t>Весь стенд написан за полтора дня в диалоге с ИИ-ассистентом. Он работал как ведущий инженер: делил работу на параллельные ветки, около десяти, и раздавал их вспомогательным агентам. По сложным вопросам мы запрашивали второе мнение у другой модели. Третья модель работает внутри робота как планировщик: 97 процентов её планов годны с первого раза. Главное — ошибки искал не глаз, а стенд: тесты и серии прогонов нашли четыре серьёзные ошибки, они на слайде.</a:t>
+              <a:t>Весь стенд написан за полтора дня в диалоге с ИИ-ассистентом. Он работал как ведущий инженер: делил работу на параллельные ветки, около десяти, и раздавал их вспомогательным агентам. По сложным вопросам мы запрашивали второе мнение у другой модели: в расследованиях она нашла 8 слабых мест, все исправлены. Третья модель работает внутри робота как планировщик: 97 процентов её планов годны с первого раза. Локальная Qwen тоже даёт годные планы, но по счёту пока уступает простому правилу: 38 против 71. Главное — ошибки искал не глаз, а стенд: тесты и серии прогонов нашли четыре серьёзные ошибки, они на слайде.</a:t>
             </a:r>
             <a:endParaRPr lang="en-US" dirty="0"/>
           </a:p>
@@ -2536,7 +2536,7 @@
           <a:p>
             <a:r>
               <a:rPr lang="en-US" dirty="0"/>
-              <a:t>Мир и робот взяты из официальных пакетов без изменений: ROS 2 Jazzy, Gazebo и TurtleBot3 Burger. Окружение ставится одной командой через pixi и одинаково работает на Mac и Linux. Агент, судья и быстрый симулятор написаны на Python; языковая модель выбирает подцели, а её ответы проверяются. Всё закрыто автоматическими проверками: их 265.</a:t>
+              <a:t>Мир и робот взяты из официальных пакетов без изменений: ROS 2 Jazzy, Gazebo и TurtleBot3 Burger. Окружение ставится одной командой через pixi и одинаково работает на Mac и Linux. Агент, судья и быстрый симулятор написаны на Python; языковая модель выбирает подцели, а её ответы проверяются. Всё закрыто автоматическими проверками: их 288.</a:t>
             </a:r>
             <a:endParaRPr lang="en-US" dirty="0"/>
           </a:p>
@@ -2712,7 +2712,7 @@
           <a:p>
             <a:r>
               <a:rPr lang="en-US" dirty="0"/>
-              <a:t>Слева то, что уже работает и проверено: стенд, навигация, поиск образцов, журнал гипотез, расследования, память и планировщик на языковой модели. Это подтверждают 265 автоматических проверок и 2 622 прогонов в 12 сериях опытов. В работе — пульт и показ полного сценария в Gazebo, роли модели в расследованиях, локальная модель и конструктор исследования. И честно о нерешённом: адаптация к изменениям среды пока не прибавляет очков, а правила судьи — наши допущения.</a:t>
+              <a:t>Слева то, что уже работает и проверено: стенд, навигация, поиск образцов, журнал гипотез, расследования, память и планировщик на языковой модели. Это подтверждают 288 автоматических проверок и 2 622 прогона в сериях опытов. В работе — пульт и показ полного сценария в Gazebo, роли модели в расследованиях, локальная модель и конструктор исследования. И честно о нерешённом: адаптация к изменениям среды пока не прибавляет очков, память между прогонами результата не меняет, а правила судьи — наши допущения.</a:t>
             </a:r>
             <a:endParaRPr lang="en-US" dirty="0"/>
           </a:p>
@@ -2800,7 +2800,7 @@
           <a:p>
             <a:r>
               <a:rPr lang="en-US" dirty="0"/>
-              <a:t>Главный опыт: два агента проходят одни и те же сценарии, которых при отладке не видели. Адаптивный собирает больше на всех уровнях, в среднем на 17 процентных пунктов: из 120 сценариев он выиграл в 72 и проиграл в 3. А вот вторая половина гипотезы не подтвердилась: на базу оба возвращаются почти всегда, разницы нет.</a:t>
+              <a:t>Главный опыт: два агента проходят одни и те же сценарии, которых при отладке не видели. Адаптивный собирает больше, в среднем на 17 процентных пунктов: из 120 сценариев он выиграл в 72 и проиграл в 3. А вот вторая половина гипотезы не подтвердилась: на базу оба возвращаются почти всегда, разницы нет.</a:t>
             </a:r>
             <a:endParaRPr lang="en-US" dirty="0"/>
           </a:p>
@@ -2888,7 +2888,7 @@
           <a:p>
             <a:r>
               <a:rPr lang="en-US" dirty="0"/>
-              <a:t>Слева стратегии поиска: спираль и подъём по сигналу из условия задачи против нашей карты вероятностей. Карта находит 99,7 процента образцов и тратит меньше заряда. Справа агент-исследователь: он держит несколько объяснений странности и проверяет их опытом. Причину он называет верно в 98 процентах случаев. На базу на трудном уровне он возвращается чаще, но эта разница пока в пределах погрешности.</a:t>
+              <a:t>Слева стратегии поиска: спираль и подъём по сигналу из условия задачи против нашей карты вероятностей. Карта находит 99,7 процента образцов и тратит меньше заряда. Справа агент-исследователь: он держит несколько объяснений странности и проверяет их опытом. На трудном уровне он вынес 177 выводов о причине, неверных из них 3, ещё 14 верны частично. И на трудном уровне он вернулся на базу в 40 прогонах из 40, адаптивный агент — в 35. По счёту разницы при этом нет.</a:t>
             </a:r>
             <a:endParaRPr lang="en-US" dirty="0"/>
           </a:p>
@@ -5634,7 +5634,7 @@
                   <a:schemeClr val="tx2"/>
                 </a:solidFill>
               </a:rPr>
-              <a:t>По сложным вопросам запрашивали второе мнение у другой модели — GPT-6 Astra.</a:t>
+              <a:t>По сложным вопросам запрашивали второе мнение у другой модели — GPT-6 Astra. В расследованиях она нашла 8 слабых мест, все исправлены.</a:t>
             </a:r>
             <a:endParaRPr lang="en-US" sz="1400" dirty="0"/>
           </a:p>
@@ -5766,7 +5766,7 @@
                   <a:schemeClr val="tx2"/>
                 </a:solidFill>
               </a:rPr>
-              <a:t>Языковая модель GPT-6 Luna выбирает подцели: 97% годных планов с первого раза — 56 из 58 запросов.</a:t>
+              <a:t>Модель выбирает подцели. GPT-6 Luna: 97% годных планов с первого раза, счёт 76 против 71 у правила. Локальная Qwen: 95% годных, но счёт 38.</a:t>
             </a:r>
             <a:endParaRPr lang="en-US" sz="1400" dirty="0"/>
           </a:p>
@@ -5987,7 +5987,7 @@
                   <a:schemeClr val="tx2"/>
                 </a:solidFill>
               </a:rPr>
-              <a:t>265 автоматических проверок, воспроизводимые серии прогонов, история в git. </a:t>
+              <a:t>288 автоматических проверок, воспроизводимые серии прогонов, история в git. </a:t>
             </a:r>
             <a:pPr algn="l" indent="0" marL="0">
               <a:buNone/>
@@ -7535,7 +7535,7 @@
                   <a:schemeClr val="tx2"/>
                 </a:solidFill>
               </a:rPr>
-              <a:t>точка или маршрут щелчком по карте — или миссия: собрать образцы</a:t>
+              <a:t>точка, маршрут щелчком по карте или миссия</a:t>
             </a:r>
             <a:endParaRPr lang="en-US" sz="1300" dirty="0"/>
           </a:p>
@@ -7645,7 +7645,7 @@
                   <a:schemeClr val="tx2"/>
                 </a:solidFill>
               </a:rPr>
-              <a:t>путь в обход столбов; положение поправляется по лидару</a:t>
+              <a:t>путь в обход столбов, положение — по лидару</a:t>
             </a:r>
             <a:endParaRPr lang="en-US" sz="1300" dirty="0"/>
           </a:p>
@@ -7755,7 +7755,7 @@
                   <a:schemeClr val="tx2"/>
                 </a:solidFill>
               </a:rPr>
-              <a:t>образцы собраны, робот на базе; счёт судьи и журнал гипотез</a:t>
+              <a:t>образцы собраны, робот на базе, счёт судьи</a:t>
             </a:r>
             <a:endParaRPr lang="en-US" sz="1300" dirty="0"/>
           </a:p>
@@ -7829,8 +7829,8 @@
         </p:nvSpPr>
         <p:spPr>
           <a:xfrm>
-            <a:off x="411480" y="5545534"/>
-            <a:ext cx="2894076" cy="457200"/>
+            <a:off x="411480" y="5527246"/>
+            <a:ext cx="2894076" cy="329184"/>
           </a:xfrm>
           <a:prstGeom prst="rect">
             <a:avLst/>
@@ -7925,8 +7925,8 @@
         </p:nvSpPr>
         <p:spPr>
           <a:xfrm>
-            <a:off x="8883396" y="5545534"/>
-            <a:ext cx="2894076" cy="457200"/>
+            <a:off x="8883396" y="5527246"/>
+            <a:ext cx="2894076" cy="329184"/>
           </a:xfrm>
           <a:prstGeom prst="rect">
             <a:avLst/>
@@ -7955,7 +7955,7 @@
       </p:sp>
       <p:pic>
         <p:nvPicPr>
-          <p:cNvPr id="26" name="scenario-shot" descr="Веб-лаборатория: тот же прогон в проигрывателе, 75 с — карта, графики, журнал гипотез">    </p:cNvPr>
+          <p:cNvPr id="26" name="scenario-shot" descr="Веб-лаборатория: тот же прогон в проигрывателе, 75 с">    </p:cNvPr>
           <p:cNvPicPr>
             <a:picLocks noChangeAspect="1"/>
           </p:cNvPicPr>
@@ -7969,8 +7969,8 @@
         </p:blipFill>
         <p:spPr>
           <a:xfrm>
-            <a:off x="3500905" y="2724912"/>
-            <a:ext cx="5187142" cy="2926080"/>
+            <a:off x="3622479" y="2724912"/>
+            <a:ext cx="4943995" cy="2788920"/>
           </a:xfrm>
           <a:prstGeom prst="rect">
             <a:avLst/>
@@ -7985,7 +7985,7 @@
         </p:nvSpPr>
         <p:spPr>
           <a:xfrm>
-            <a:off x="3396996" y="5696712"/>
+            <a:off x="3396996" y="5559552"/>
             <a:ext cx="5394960" cy="237744"/>
           </a:xfrm>
           <a:prstGeom prst="rect">
@@ -8007,7 +8007,7 @@
                   <a:schemeClr val="tx2"/>
                 </a:solidFill>
               </a:rPr>
-              <a:t>Веб-лаборатория: тот же прогон в проигрывателе, 75 с — карта, графики, журнал гипотез</a:t>
+              <a:t>Веб-лаборатория: тот же прогон в проигрывателе, 75 с</a:t>
             </a:r>
             <a:endParaRPr lang="en-US" sz="1200" dirty="0"/>
           </a:p>
@@ -8021,17 +8021,17 @@
         </p:nvSpPr>
         <p:spPr>
           <a:xfrm>
-            <a:off x="548640" y="5980176"/>
-            <a:ext cx="11091672" cy="237744"/>
-          </a:xfrm>
-          <a:prstGeom prst="rect">
-            <a:avLst/>
-          </a:prstGeom>
-          <a:noFill/>
-          <a:ln/>
-        </p:spPr>
-        <p:txBody>
-          <a:bodyPr wrap="square" lIns="0" tIns="0" rIns="0" bIns="0" rtlCol="0" anchor="ctr"/>
+            <a:off x="548640" y="5870448"/>
+            <a:ext cx="11091672" cy="347472"/>
+          </a:xfrm>
+          <a:prstGeom prst="rect">
+            <a:avLst/>
+          </a:prstGeom>
+          <a:noFill/>
+          <a:ln/>
+        </p:spPr>
+        <p:txBody>
+          <a:bodyPr wrap="square" lIns="0" tIns="0" rIns="0" bIns="0" rtlCol="0" anchor="t"/>
           <a:lstStyle/>
           <a:p>
             <a:pPr algn="ctr" indent="0" marL="0">
@@ -10794,7 +10794,7 @@
                   <a:schemeClr val="tx2"/>
                 </a:solidFill>
               </a:rPr>
-              <a:t>265 автоматических проверок; запуск одной командой</a:t>
+              <a:t>288 автоматических проверок; запуск одной командой</a:t>
             </a:r>
             <a:endParaRPr lang="en-US" sz="1400" dirty="0"/>
           </a:p>
@@ -11160,7 +11160,7 @@
                   <a:schemeClr val="tx2"/>
                 </a:solidFill>
               </a:rPr>
-              <a:t>одометрия (счёт пути по колёсам) и поправка по лидару: скан совмещается с картой, ошибка 1,7–1,9 см</a:t>
+              <a:t>одометрия и поправка по лидару: скан совмещается с картой, ошибка 1,7–1,9 см</a:t>
             </a:r>
             <a:endParaRPr lang="en-US" sz="1400" dirty="0"/>
           </a:p>
@@ -11919,7 +11919,7 @@
                   <a:schemeClr val="tx1"/>
                 </a:solidFill>
               </a:rPr>
-              <a:t>265</a:t>
+              <a:t>288</a:t>
             </a:r>
             <a:pPr algn="r" indent="0" marL="0">
               <a:buNone/>
@@ -11955,7 +11955,7 @@
                   <a:schemeClr val="tx2"/>
                 </a:solidFill>
               </a:rPr>
-              <a:t> прогонов</a:t>
+              <a:t> прогона</a:t>
             </a:r>
             <a:endParaRPr lang="en-US" sz="1400" dirty="0"/>
           </a:p>
@@ -12230,11 +12230,11 @@
         <p:spPr>
           <a:xfrm>
             <a:off x="7223760" y="1691640"/>
-            <a:ext cx="4416552" cy="2377440"/>
+            <a:ext cx="4416552" cy="2176272"/>
           </a:xfrm>
           <a:prstGeom prst="roundRect">
             <a:avLst>
-              <a:gd name="adj" fmla="val 3077"/>
+              <a:gd name="adj" fmla="val 3361"/>
             </a:avLst>
           </a:prstGeom>
           <a:solidFill>
@@ -12325,8 +12325,216 @@
         </p:nvSpPr>
         <p:spPr>
           <a:xfrm>
-            <a:off x="7452360" y="2468880"/>
-            <a:ext cx="3959352" cy="1508760"/>
+            <a:off x="7452360" y="2423160"/>
+            <a:ext cx="3959352" cy="1371600"/>
+          </a:xfrm>
+          <a:prstGeom prst="rect">
+            <a:avLst/>
+          </a:prstGeom>
+          <a:noFill/>
+          <a:ln/>
+        </p:spPr>
+        <p:txBody>
+          <a:bodyPr wrap="square" lIns="0" tIns="0" rIns="0" bIns="0" rtlCol="0" anchor="t"/>
+          <a:lstStyle/>
+          <a:p>
+            <a:pPr algn="l" marL="342900" indent="-342900">
+              <a:spcAft>
+                <a:spcPts val="200"/>
+              </a:spcAft>
+              <a:buSzPct val="100000"/>
+              <a:buChar char="•"/>
+            </a:pPr>
+            <a:r>
+              <a:rPr lang="en-US" sz="1400" dirty="0">
+                <a:solidFill>
+                  <a:schemeClr val="tx1"/>
+                </a:solidFill>
+              </a:rPr>
+              <a:t>Пульт и показ полного сценария в Gazebo</a:t>
+            </a:r>
+            <a:endParaRPr lang="en-US" sz="1400" dirty="0"/>
+          </a:p>
+          <a:p>
+            <a:pPr algn="l" marL="342900" indent="-342900">
+              <a:spcAft>
+                <a:spcPts val="200"/>
+              </a:spcAft>
+              <a:buSzPct val="100000"/>
+              <a:buChar char="•"/>
+            </a:pPr>
+            <a:r>
+              <a:rPr lang="en-US" sz="1400" dirty="0">
+                <a:solidFill>
+                  <a:schemeClr val="tx1"/>
+                </a:solidFill>
+              </a:rPr>
+              <a:t>Роли модели «автор» и «критик» в расследованиях</a:t>
+            </a:r>
+            <a:endParaRPr lang="en-US" sz="1400" dirty="0"/>
+          </a:p>
+          <a:p>
+            <a:pPr algn="l" marL="342900" indent="-342900">
+              <a:spcAft>
+                <a:spcPts val="200"/>
+              </a:spcAft>
+              <a:buSzPct val="100000"/>
+              <a:buChar char="•"/>
+            </a:pPr>
+            <a:r>
+              <a:rPr lang="en-US" sz="1400" dirty="0">
+                <a:solidFill>
+                  <a:schemeClr val="tx1"/>
+                </a:solidFill>
+              </a:rPr>
+              <a:t>Локальная Qwen: счёт пока ниже правила</a:t>
+            </a:r>
+            <a:endParaRPr lang="en-US" sz="1400" dirty="0"/>
+          </a:p>
+          <a:p>
+            <a:pPr algn="l" marL="342900" indent="-342900">
+              <a:spcAft>
+                <a:spcPts val="200"/>
+              </a:spcAft>
+              <a:buSzPct val="100000"/>
+              <a:buChar char="•"/>
+            </a:pPr>
+            <a:r>
+              <a:rPr lang="en-US" sz="1400" dirty="0">
+                <a:solidFill>
+                  <a:schemeClr val="tx1"/>
+                </a:solidFill>
+              </a:rPr>
+              <a:t>Конструктор исследования</a:t>
+            </a:r>
+            <a:endParaRPr lang="en-US" sz="1400" dirty="0"/>
+          </a:p>
+          <a:p>
+            <a:pPr algn="l" marL="342900" indent="-342900">
+              <a:spcAft>
+                <a:spcPts val="200"/>
+              </a:spcAft>
+              <a:buSzPct val="100000"/>
+              <a:buChar char="•"/>
+            </a:pPr>
+            <a:r>
+              <a:rPr lang="en-US" sz="1400" dirty="0">
+                <a:solidFill>
+                  <a:schemeClr val="tx1"/>
+                </a:solidFill>
+              </a:rPr>
+              <a:t>Построение карты через SLAM (бонус)</a:t>
+            </a:r>
+            <a:endParaRPr lang="en-US" sz="1400" dirty="0"/>
+          </a:p>
+        </p:txBody>
+      </p:sp>
+      <p:sp>
+        <p:nvSpPr>
+          <p:cNvPr id="15" name="open-card"/>
+          <p:cNvSpPr/>
+          <p:nvPr/>
+        </p:nvSpPr>
+        <p:spPr>
+          <a:xfrm>
+            <a:off x="7223760" y="4096512"/>
+            <a:ext cx="4416552" cy="2121408"/>
+          </a:xfrm>
+          <a:prstGeom prst="roundRect">
+            <a:avLst>
+              <a:gd name="adj" fmla="val 3448"/>
+            </a:avLst>
+          </a:prstGeom>
+          <a:solidFill>
+            <a:schemeClr val="tx2"/>
+          </a:solidFill>
+          <a:ln/>
+        </p:spPr>
+      </p:sp>
+      <p:sp>
+        <p:nvSpPr>
+          <p:cNvPr id="16" name="open-badge"/>
+          <p:cNvSpPr txBox="1"/>
+          <p:nvPr/>
+        </p:nvSpPr>
+        <p:spPr>
+          <a:xfrm>
+            <a:off x="7452360" y="4261104"/>
+            <a:ext cx="521208" cy="457200"/>
+          </a:xfrm>
+          <a:prstGeom prst="hexagon">
+            <a:avLst/>
+          </a:prstGeom>
+          <a:solidFill>
+            <a:schemeClr val="accent5"/>
+          </a:solidFill>
+          <a:ln/>
+        </p:spPr>
+        <p:txBody>
+          <a:bodyPr wrap="square" lIns="0" tIns="0" rIns="0" bIns="0" rtlCol="0" anchor="ctr"/>
+          <a:lstStyle/>
+          <a:p>
+            <a:pPr algn="ctr" indent="0" marL="0">
+              <a:buNone/>
+            </a:pPr>
+            <a:r>
+              <a:rPr lang="en-US" sz="1500" b="1" dirty="0">
+                <a:solidFill>
+                  <a:schemeClr val="bg1"/>
+                </a:solidFill>
+              </a:rPr>
+              <a:t>3</a:t>
+            </a:r>
+            <a:endParaRPr lang="en-US" sz="1500" dirty="0"/>
+          </a:p>
+        </p:txBody>
+      </p:sp>
+      <p:sp>
+        <p:nvSpPr>
+          <p:cNvPr id="17" name="open-head"/>
+          <p:cNvSpPr txBox="1"/>
+          <p:nvPr/>
+        </p:nvSpPr>
+        <p:spPr>
+          <a:xfrm>
+            <a:off x="8138160" y="4261104"/>
+            <a:ext cx="3319272" cy="457200"/>
+          </a:xfrm>
+          <a:prstGeom prst="rect">
+            <a:avLst/>
+          </a:prstGeom>
+          <a:noFill/>
+          <a:ln/>
+        </p:spPr>
+        <p:txBody>
+          <a:bodyPr wrap="square" lIns="0" tIns="0" rIns="0" bIns="0" rtlCol="0" anchor="ctr"/>
+          <a:lstStyle/>
+          <a:p>
+            <a:pPr algn="l" indent="0" marL="0">
+              <a:buNone/>
+            </a:pPr>
+            <a:r>
+              <a:rPr lang="en-US" sz="1800" b="1" dirty="0">
+                <a:solidFill>
+                  <a:schemeClr val="bg1"/>
+                </a:solidFill>
+              </a:rPr>
+              <a:t>Не решено — говорим прямо</a:t>
+            </a:r>
+            <a:endParaRPr lang="en-US" sz="1800" dirty="0"/>
+          </a:p>
+        </p:txBody>
+      </p:sp>
+      <p:sp>
+        <p:nvSpPr>
+          <p:cNvPr id="18" name="open-list"/>
+          <p:cNvSpPr txBox="1"/>
+          <p:nvPr/>
+        </p:nvSpPr>
+        <p:spPr>
+          <a:xfrm>
+            <a:off x="7452360" y="4809744"/>
+            <a:ext cx="3959352" cy="1335024"/>
           </a:xfrm>
           <a:prstGeom prst="rect">
             <a:avLst/>
@@ -12346,14 +12554,14 @@
               <a:buChar char="•"/>
             </a:pPr>
             <a:r>
-              <a:rPr lang="en-US" sz="1400" dirty="0">
-                <a:solidFill>
-                  <a:schemeClr val="tx1"/>
-                </a:solidFill>
-              </a:rPr>
-              <a:t>Пульт и показ полного сценария в Gazebo</a:t>
-            </a:r>
-            <a:endParaRPr lang="en-US" sz="1400" dirty="0"/>
+              <a:rPr lang="en-US" sz="1300" dirty="0">
+                <a:solidFill>
+                  <a:schemeClr val="bg1"/>
+                </a:solidFill>
+              </a:rPr>
+              <a:t>Адаптация к изменениям среды пока не прибавляет очков</a:t>
+            </a:r>
+            <a:endParaRPr lang="en-US" sz="1300" dirty="0"/>
           </a:p>
           <a:p>
             <a:pPr algn="l" marL="342900" indent="-342900">
@@ -12364,227 +12572,19 @@
               <a:buChar char="•"/>
             </a:pPr>
             <a:r>
-              <a:rPr lang="en-US" sz="1400" dirty="0">
-                <a:solidFill>
-                  <a:schemeClr val="tx1"/>
-                </a:solidFill>
-              </a:rPr>
-              <a:t>Роли модели «автор» и «критик» в расследованиях</a:t>
-            </a:r>
-            <a:endParaRPr lang="en-US" sz="1400" dirty="0"/>
+              <a:rPr lang="en-US" sz="1300" dirty="0">
+                <a:solidFill>
+                  <a:schemeClr val="bg1"/>
+                </a:solidFill>
+              </a:rPr>
+              <a:t>Обучение грунтам и память — об опасных зонах и между прогонами — вклада не показали</a:t>
+            </a:r>
+            <a:endParaRPr lang="en-US" sz="1300" dirty="0"/>
           </a:p>
           <a:p>
             <a:pPr algn="l" marL="342900" indent="-342900">
               <a:spcAft>
                 <a:spcPts val="300"/>
-              </a:spcAft>
-              <a:buSzPct val="100000"/>
-              <a:buChar char="•"/>
-            </a:pPr>
-            <a:r>
-              <a:rPr lang="en-US" sz="1400" dirty="0">
-                <a:solidFill>
-                  <a:schemeClr val="tx1"/>
-                </a:solidFill>
-              </a:rPr>
-              <a:t>Локальная модель Qwen</a:t>
-            </a:r>
-            <a:endParaRPr lang="en-US" sz="1400" dirty="0"/>
-          </a:p>
-          <a:p>
-            <a:pPr algn="l" marL="342900" indent="-342900">
-              <a:spcAft>
-                <a:spcPts val="300"/>
-              </a:spcAft>
-              <a:buSzPct val="100000"/>
-              <a:buChar char="•"/>
-            </a:pPr>
-            <a:r>
-              <a:rPr lang="en-US" sz="1400" dirty="0">
-                <a:solidFill>
-                  <a:schemeClr val="tx1"/>
-                </a:solidFill>
-              </a:rPr>
-              <a:t>Конструктор исследования</a:t>
-            </a:r>
-            <a:endParaRPr lang="en-US" sz="1400" dirty="0"/>
-          </a:p>
-          <a:p>
-            <a:pPr algn="l" marL="342900" indent="-342900">
-              <a:spcAft>
-                <a:spcPts val="300"/>
-              </a:spcAft>
-              <a:buSzPct val="100000"/>
-              <a:buChar char="•"/>
-            </a:pPr>
-            <a:r>
-              <a:rPr lang="en-US" sz="1400" dirty="0">
-                <a:solidFill>
-                  <a:schemeClr val="tx1"/>
-                </a:solidFill>
-              </a:rPr>
-              <a:t>Построение карты через SLAM (бонус)</a:t>
-            </a:r>
-            <a:endParaRPr lang="en-US" sz="1400" dirty="0"/>
-          </a:p>
-        </p:txBody>
-      </p:sp>
-      <p:sp>
-        <p:nvSpPr>
-          <p:cNvPr id="15" name="open-card"/>
-          <p:cNvSpPr/>
-          <p:nvPr/>
-        </p:nvSpPr>
-        <p:spPr>
-          <a:xfrm>
-            <a:off x="7223760" y="4297680"/>
-            <a:ext cx="4416552" cy="1920240"/>
-          </a:xfrm>
-          <a:prstGeom prst="roundRect">
-            <a:avLst>
-              <a:gd name="adj" fmla="val 3810"/>
-            </a:avLst>
-          </a:prstGeom>
-          <a:solidFill>
-            <a:schemeClr val="tx2"/>
-          </a:solidFill>
-          <a:ln/>
-        </p:spPr>
-      </p:sp>
-      <p:sp>
-        <p:nvSpPr>
-          <p:cNvPr id="16" name="open-badge"/>
-          <p:cNvSpPr txBox="1"/>
-          <p:nvPr/>
-        </p:nvSpPr>
-        <p:spPr>
-          <a:xfrm>
-            <a:off x="7452360" y="4462272"/>
-            <a:ext cx="521208" cy="457200"/>
-          </a:xfrm>
-          <a:prstGeom prst="hexagon">
-            <a:avLst/>
-          </a:prstGeom>
-          <a:solidFill>
-            <a:schemeClr val="accent5"/>
-          </a:solidFill>
-          <a:ln/>
-        </p:spPr>
-        <p:txBody>
-          <a:bodyPr wrap="square" lIns="0" tIns="0" rIns="0" bIns="0" rtlCol="0" anchor="ctr"/>
-          <a:lstStyle/>
-          <a:p>
-            <a:pPr algn="ctr" indent="0" marL="0">
-              <a:buNone/>
-            </a:pPr>
-            <a:r>
-              <a:rPr lang="en-US" sz="1500" b="1" dirty="0">
-                <a:solidFill>
-                  <a:schemeClr val="bg1"/>
-                </a:solidFill>
-              </a:rPr>
-              <a:t>3</a:t>
-            </a:r>
-            <a:endParaRPr lang="en-US" sz="1500" dirty="0"/>
-          </a:p>
-        </p:txBody>
-      </p:sp>
-      <p:sp>
-        <p:nvSpPr>
-          <p:cNvPr id="17" name="open-head"/>
-          <p:cNvSpPr txBox="1"/>
-          <p:nvPr/>
-        </p:nvSpPr>
-        <p:spPr>
-          <a:xfrm>
-            <a:off x="8138160" y="4462272"/>
-            <a:ext cx="3319272" cy="457200"/>
-          </a:xfrm>
-          <a:prstGeom prst="rect">
-            <a:avLst/>
-          </a:prstGeom>
-          <a:noFill/>
-          <a:ln/>
-        </p:spPr>
-        <p:txBody>
-          <a:bodyPr wrap="square" lIns="0" tIns="0" rIns="0" bIns="0" rtlCol="0" anchor="ctr"/>
-          <a:lstStyle/>
-          <a:p>
-            <a:pPr algn="l" indent="0" marL="0">
-              <a:buNone/>
-            </a:pPr>
-            <a:r>
-              <a:rPr lang="en-US" sz="1800" b="1" dirty="0">
-                <a:solidFill>
-                  <a:schemeClr val="bg1"/>
-                </a:solidFill>
-              </a:rPr>
-              <a:t>Не решено — говорим прямо</a:t>
-            </a:r>
-            <a:endParaRPr lang="en-US" sz="1800" dirty="0"/>
-          </a:p>
-        </p:txBody>
-      </p:sp>
-      <p:sp>
-        <p:nvSpPr>
-          <p:cNvPr id="18" name="open-list"/>
-          <p:cNvSpPr txBox="1"/>
-          <p:nvPr/>
-        </p:nvSpPr>
-        <p:spPr>
-          <a:xfrm>
-            <a:off x="7452360" y="5029200"/>
-            <a:ext cx="3959352" cy="1115568"/>
-          </a:xfrm>
-          <a:prstGeom prst="rect">
-            <a:avLst/>
-          </a:prstGeom>
-          <a:noFill/>
-          <a:ln/>
-        </p:spPr>
-        <p:txBody>
-          <a:bodyPr wrap="square" lIns="0" tIns="0" rIns="0" bIns="0" rtlCol="0" anchor="t"/>
-          <a:lstStyle/>
-          <a:p>
-            <a:pPr algn="l" marL="342900" indent="-342900">
-              <a:spcAft>
-                <a:spcPts val="400"/>
-              </a:spcAft>
-              <a:buSzPct val="100000"/>
-              <a:buChar char="•"/>
-            </a:pPr>
-            <a:r>
-              <a:rPr lang="en-US" sz="1300" dirty="0">
-                <a:solidFill>
-                  <a:schemeClr val="bg1"/>
-                </a:solidFill>
-              </a:rPr>
-              <a:t>Адаптация к изменениям среды пока не прибавляет очков</a:t>
-            </a:r>
-            <a:endParaRPr lang="en-US" sz="1300" dirty="0"/>
-          </a:p>
-          <a:p>
-            <a:pPr algn="l" marL="342900" indent="-342900">
-              <a:spcAft>
-                <a:spcPts val="400"/>
-              </a:spcAft>
-              <a:buSzPct val="100000"/>
-              <a:buChar char="•"/>
-            </a:pPr>
-            <a:r>
-              <a:rPr lang="en-US" sz="1300" dirty="0">
-                <a:solidFill>
-                  <a:schemeClr val="bg1"/>
-                </a:solidFill>
-              </a:rPr>
-              <a:t>Обучение грунтам и память об опасных зонах вклада не показали</a:t>
-            </a:r>
-            <a:endParaRPr lang="en-US" sz="1300" dirty="0"/>
-          </a:p>
-          <a:p>
-            <a:pPr algn="l" marL="342900" indent="-342900">
-              <a:spcAft>
-                <a:spcPts val="400"/>
               </a:spcAft>
               <a:buSzPct val="100000"/>
               <a:buChar char="•"/>
@@ -13257,7 +13257,7 @@
                   <a:schemeClr val="accent5"/>
                 </a:solidFill>
               </a:rPr>
-              <a:t>Карта вероятностей находит почти все образцы; исследователь верно называет причину сбоев</a:t>
+              <a:t>Карта вероятностей находит больше образцов, чем простые правила; исследователь чаще возвращается на базу</a:t>
             </a:r>
             <a:endParaRPr lang="en-US" sz="1600" dirty="0"/>
           </a:p>
@@ -13434,7 +13434,7 @@
         <p:spPr>
           <a:xfrm>
             <a:off x="6583680" y="4343400"/>
-            <a:ext cx="1417320" cy="1188720"/>
+            <a:ext cx="2103120" cy="1188720"/>
           </a:xfrm>
           <a:prstGeom prst="rect">
             <a:avLst/>
@@ -13450,14 +13450,14 @@
               <a:buNone/>
             </a:pPr>
             <a:r>
-              <a:rPr lang="en-US" sz="3600" b="1" dirty="0">
+              <a:rPr lang="en-US" sz="3400" b="1" dirty="0">
                 <a:solidFill>
                   <a:schemeClr val="tx1"/>
                 </a:solidFill>
               </a:rPr>
-              <a:t>98%</a:t>
-            </a:r>
-            <a:endParaRPr lang="en-US" sz="3600" dirty="0"/>
+              <a:t>3 из 177</a:t>
+            </a:r>
+            <a:endParaRPr lang="en-US" sz="3400" dirty="0"/>
           </a:p>
         </p:txBody>
       </p:sp>
@@ -13469,8 +13469,8 @@
         </p:nvSpPr>
         <p:spPr>
           <a:xfrm>
-            <a:off x="8046720" y="4343400"/>
-            <a:ext cx="3410712" cy="1188720"/>
+            <a:off x="8732520" y="4343400"/>
+            <a:ext cx="2724912" cy="1188720"/>
           </a:xfrm>
           <a:prstGeom prst="rect">
             <a:avLst/>
@@ -13491,7 +13491,7 @@
                   <a:schemeClr val="tx2"/>
                 </a:solidFill>
               </a:rPr>
-              <a:t>причин названо верно: исследователь держит несколько объяснений и проверяет их опытом</a:t>
+              <a:t>выводов исследователя о причине неверны; ещё 14 верны частично. Найдено 68% настоящих сбоев</a:t>
             </a:r>
             <a:endParaRPr lang="en-US" sz="1400" dirty="0"/>
           </a:p>
@@ -13527,7 +13527,7 @@
                   <a:schemeClr val="accent5"/>
                 </a:solidFill>
               </a:rPr>
-              <a:t>Опыт E10: усложнённые правила — у одного симптома несколько причин; по 40 прогонов. Разница в возврате с адаптивным агентом пока в пределах погрешности.</a:t>
+              <a:t>Опыт E10: усложнённые правила — у одного симптома несколько причин; по 40 прогонов. Исследователь возвращается чаще адаптивного на 12,5 п. п. (95% интервал — от 2,5 до 22,5); по счёту разницы нет.</a:t>
             </a:r>
             <a:endParaRPr lang="en-US" sz="1100" dirty="0"/>
           </a:p>

--- a/presentation/checkpoint2.pptx
+++ b/presentation/checkpoint2.pptx
@@ -117,7 +117,7 @@
   <p:extLst>
     <p:ext uri="{521415D9-36F7-43E2-AB2F-B90AF26B5E84}">
       <p14:sectionLst xmlns:p14="http://schemas.microsoft.com/office/powerpoint/2010/main">
-        <p14:section name="Задача и решение" id="{4bb42933-116e-6856-4071-b1ef5da232af}">
+        <p14:section name="Задача и решение" id="{06e431f8-b54f-916b-38a5-2b00fe66afff}">
           <p14:sldIdLst>
             <p14:sldId id="256"/>
             <p14:sldId id="257"/>
@@ -127,7 +127,7 @@
             <p14:sldId id="261"/>
           </p14:sldIdLst>
         </p14:section>
-        <p14:section name="Состояние и результаты" id="{16c1ea71-7f86-09d3-da75-72d566b4d774}">
+        <p14:section name="Состояние и результаты" id="{6789391b-36d3-85d2-d603-7d831ee918b0}">
           <p14:sldIdLst>
             <p14:sldId id="262"/>
             <p14:sldId id="263"/>
@@ -135,7 +135,7 @@
             <p14:sldId id="265"/>
           </p14:sldIdLst>
         </p14:section>
-        <p14:section name="Как работали" id="{090cd1f5-e351-4453-5b73-4339afd196ab}">
+        <p14:section name="Как работали" id="{c3f27179-3de9-582b-8683-3bfeb0b29003}">
           <p14:sldIdLst>
             <p14:sldId id="266"/>
           </p14:sldIdLst>
@@ -2008,7 +2008,7 @@
           <a:p>
             <a:r>
               <a:rPr lang="en-US" dirty="0"/>
-              <a:t>Наш проект — автономный ИИ-исследователь на роботе TurtleBot3. Сегодня покажем, что уже работает, как устроено решение и что показали опыты. На картинке настоящий прогон в Gazebo: робот собрал 5 образцов из 5 и вернулся на базу.</a:t>
+              <a:t>Наш проект — автономный ИИ-исследователь на роботе TurtleBot3. Покажем, что уже работает и что показали опыты. На картинке настоящий прогон в Gazebo: собрано 5 образцов из 5, робот вернулся на базу.</a:t>
             </a:r>
             <a:endParaRPr lang="en-US" dirty="0"/>
           </a:p>
@@ -2096,7 +2096,7 @@
           <a:p>
             <a:r>
               <a:rPr lang="en-US" dirty="0"/>
-              <a:t>Серии считаются в быстром симуляторе, поэтому мы проверили перенос в Gazebo с настоящей физикой. Сначала одометрия, то есть счёт пути по колёсам, уходила больше чем на метр. Причину нашли: первые тридцать секунд после появления в мире робот покачивается, и манёвры в это время сбивают одометрию. Теперь агент ждёт и сверяет положение с лидаром: ошибка около двух сантиметров, максимум 4,8. Уровни easy и medium совпали с быстрым симулятором полностью, на hard собрано 5 против 6.</a:t>
+              <a:t>Серии считаются в быстром симуляторе, поэтому перенос проверили в Gazebo с настоящей физикой. Сначала одометрия уходила больше чем на метр: первые тридцать секунд робот покачивается, и манёвры её сбивают. Теперь агент ждёт и сверяет положение с лидаром: ошибка около двух сантиметров. Результат совпал с быстрым симулятором с точностью до одного образца: на hard собрано 5 против 6.</a:t>
             </a:r>
             <a:endParaRPr lang="en-US" dirty="0"/>
           </a:p>
@@ -2184,7 +2184,7 @@
           <a:p>
             <a:r>
               <a:rPr lang="en-US" dirty="0"/>
-              <a:t>Весь стенд написан за полтора дня в диалоге с ИИ-ассистентом. Он работал как ведущий инженер: делил работу на параллельные ветки, около десяти, и раздавал их вспомогательным агентам. По сложным вопросам мы запрашивали второе мнение у другой модели: в расследованиях она нашла 8 слабых мест, все исправлены. Третья модель работает внутри робота как планировщик: 97 процентов её планов годны с первого раза. Локальная Qwen тоже даёт годные планы, но по счёту пока уступает простому правилу: 38 против 71. Главное — ошибки искал не глаз, а стенд: тесты и серии прогонов нашли четыре серьёзные ошибки, они на слайде.</a:t>
+              <a:t>Стенд написан за полтора дня в диалоге с ИИ-ассистентом: он вёл работу как ведущий инженер и раздавал параллельные ветки вспомогательным агентам. Вторая модель давала второе мнение и нашла 8 слабых мест в расследованиях, все исправлены. Третья планирует внутри робота: 97 процентов годных планов с первого раза. И главное: ошибки находил стенд, а не глаз — четыре из них на слайде.</a:t>
             </a:r>
             <a:endParaRPr lang="en-US" dirty="0"/>
           </a:p>
@@ -2272,7 +2272,7 @@
           <a:p>
             <a:r>
               <a:rPr lang="en-US" dirty="0"/>
-              <a:t>На арене спрятаны образцы, участки дорогого грунта и опасные зоны, и робот ничего из этого не видит: камеры у него нет. У него есть лидар, счётчик пути, остаток заряда и датчик, который говорит только, насколько близко образец, но не в какой стороне. Цель — собрать как можно больше образцов и вернуться на базу, пока не села батарея: её хватает на 24 метра пути. Наша гипотеза: агент, который учится по измерениям и перестраивает маршрут, соберёт больше, чем агент с планом, составленным заранее.</a:t>
+              <a:t>На арене спрятаны образцы, дорогой грунт и опасные зоны, и робот их не видит: камеры нет, а датчик говорит только, насколько близко образец. Цель — собрать больше образцов и вернуться на базу, пока не села батарея: её хватает на 24 метра. Гипотеза: агент, который учится по измерениям, соберёт больше, чем агент с планом, составленным заранее.</a:t>
             </a:r>
             <a:endParaRPr lang="en-US" dirty="0"/>
           </a:p>
@@ -2360,7 +2360,7 @@
           <a:p>
             <a:r>
               <a:rPr lang="en-US" dirty="0"/>
-              <a:t>Полный сценарий — пять шагов: запуск, карта, задача, движение, результат. Одна команда поднимает мир, робота, судью и пульт. Робот ещё стоит, а лидар уже строит карту: видно 36 процентов пола. Задачу можно дать щелчком по карте — точку или маршрут — либо запустить миссию, и тогда робот сам ищет образцы. На кадрах настоящая миссия в Gazebo на трудном уровне: собрано 5 из 7, робот вернулся на базу. По дороге он получил штраф, заметил сбой датчика и записал гипотезы: всего 14, подтверждено 8. ЗДЕСЬ — ЖИВОЙ ПОКАЗ (docs/demo_script.md): пульт уже открыт; показать карту из одной точки, поставить маршрут из пяти-шести точек, нажать «Ехать», затем «Домой» и «Запустить миссию». Полный сценарий показа идёт около пяти минут — для короткой защиты хватит маршрута и начала миссии, итог миссии есть на слайде.</a:t>
+              <a:t>Полный сценарий — пять шагов: запуск одной командой, карта по лидару, задача щелчком по карте или миссия, движение и результат. На кадрах настоящая миссия в Gazebo на трудном уровне: собрано 5 из 7, робот вернулся на базу. По дороге — штраф и сбой датчика: робот записал 14 гипотез, подтвердил 8. ЗДЕСЬ — ЖИВОЙ ПОКАЗ (docs/demo_script.md): пульт уже открыт; показать карту из одной точки, поставить маршрут из пяти-шести точек, нажать «Ехать», затем «Домой» и «Запустить миссию».</a:t>
             </a:r>
             <a:endParaRPr lang="en-US" dirty="0"/>
           </a:p>
@@ -2448,7 +2448,7 @@
           <a:p>
             <a:r>
               <a:rPr lang="en-US" dirty="0"/>
-              <a:t>Слева стенд: генератор сценариев, судья со скрытой правдой и симулятор. Симуляторов два: Gazebo для показа и быстрый — для серий опытов. Справа агент: картина мира, планировщик, исполнитель и журнал гипотез. Между ними только каналы из условия задачи, поэтому нашего судью можно заменить судьёй организаторов, не трогая агента. Каждый прогон записывается, серии считаются на одинаковых сценариях, а смотреть всё можно в веб-лаборатории.</a:t>
+              <a:t>Слева стенд: генератор сценариев, судья и симулятор — Gazebo для показа и быстрый для серий опытов. Справа агент: картина мира, планировщик, исполнитель и журнал гипотез. Между ними только каналы из условия задачи, поэтому нашего судью можно заменить судьёй организаторов, не трогая агента.</a:t>
             </a:r>
             <a:endParaRPr lang="en-US" dirty="0"/>
           </a:p>
@@ -2536,7 +2536,7 @@
           <a:p>
             <a:r>
               <a:rPr lang="en-US" dirty="0"/>
-              <a:t>Мир и робот взяты из официальных пакетов без изменений: ROS 2 Jazzy, Gazebo и TurtleBot3 Burger. Окружение ставится одной командой через pixi и одинаково работает на Mac и Linux. Агент, судья и быстрый симулятор написаны на Python; языковая модель выбирает подцели, а её ответы проверяются. Всё закрыто автоматическими проверками: их 288.</a:t>
+              <a:t>Мир и робот — из официальных пакетов без изменений: ROS 2 Jazzy, Gazebo и TurtleBot3 Burger. Агент, судья и быстрый симулятор — свои, на Python; всё ставится одной командой и закрыто автоматическими проверками: их 300.</a:t>
             </a:r>
             <a:endParaRPr lang="en-US" dirty="0"/>
           </a:p>
@@ -2624,7 +2624,7 @@
           <a:p>
             <a:r>
               <a:rPr lang="en-US" dirty="0"/>
-              <a:t>Карта стен дана заранее сеткой с клеткой 5 сантиметров, и робот строит такую же сам по лидару: карты совпадают на 96 процентов. Положение считается по колёсам, это одометрия, и поправляется по лидару: скан совмещается с картой, ошибка около двух сантиметров. Путь ищет алгоритм Дейкстры по цене клеток, ближе 17 сантиметров к стенам робот не едет. Поверх лежат карта вероятностей образцов и карта стоимости грунта: они меняют цену клеток прямо во время прогона.</a:t>
+              <a:t>Карта стен дана сеткой с клеткой 5 сантиметров, и робот строит такую же сам по лидару: совпадение 96 процентов. Положение — одометрия, то есть счёт пути по колёсам, с поправкой по лидару: ошибка около двух сантиметров. Путь ищет алгоритм Дейкстры по цене клеток, ближе 17 сантиметров к стенам робот не едет; цену меняют карты вероятностей образцов и стоимости грунта.</a:t>
             </a:r>
             <a:endParaRPr lang="en-US" dirty="0"/>
           </a:p>
@@ -2712,7 +2712,7 @@
           <a:p>
             <a:r>
               <a:rPr lang="en-US" dirty="0"/>
-              <a:t>Слева то, что уже работает и проверено: стенд, навигация, поиск образцов, журнал гипотез, расследования, память и планировщик на языковой модели. Это подтверждают 288 автоматических проверок и 2 622 прогона в сериях опытов. В работе — пульт и показ полного сценария в Gazebo, роли модели в расследованиях, локальная модель и конструктор исследования. И честно о нерешённом: адаптация к изменениям среды пока не прибавляет очков, память между прогонами результата не меняет, а правила судьи — наши допущения.</a:t>
+              <a:t>Слева то, что работает и проверено: стенд, навигация, поиск образцов, журнал гипотез, расследования и планировщик на языковой модели — 300 автоматических проверок и 3 606 прогонов. В работе — пульт и показ в Gazebo, роли модели, локальная модель и конструктор исследования. И прямо о нерешённом: адаптация к изменениям среды пока не прибавляет очков, память между прогонами результата не меняет, а правила судьи — наши допущения.</a:t>
             </a:r>
             <a:endParaRPr lang="en-US" dirty="0"/>
           </a:p>
@@ -2800,7 +2800,7 @@
           <a:p>
             <a:r>
               <a:rPr lang="en-US" dirty="0"/>
-              <a:t>Главный опыт: два агента проходят одни и те же сценарии, которых при отладке не видели. Адаптивный собирает больше, в среднем на 17 процентных пунктов: из 120 сценариев он выиграл в 72 и проиграл в 3. А вот вторая половина гипотезы не подтвердилась: на базу оба возвращаются почти всегда, разницы нет.</a:t>
+              <a:t>Главный опыт: два агента на одних и тех же сценариях, которых при отладке не видели. Адаптивный собирает больше, в среднем на 17 процентных пунктов: выиграл в 72 сценариях из 120, проиграл в 3. А на базу оба возвращаются одинаково — эта часть гипотезы не подтвердилась.</a:t>
             </a:r>
             <a:endParaRPr lang="en-US" dirty="0"/>
           </a:p>
@@ -2888,7 +2888,7 @@
           <a:p>
             <a:r>
               <a:rPr lang="en-US" dirty="0"/>
-              <a:t>Слева стратегии поиска: спираль и подъём по сигналу из условия задачи против нашей карты вероятностей. Карта находит 99,7 процента образцов и тратит меньше заряда. Справа агент-исследователь: он держит несколько объяснений странности и проверяет их опытом. На трудном уровне он вынес 177 выводов о причине, неверных из них 3, ещё 14 верны частично. И на трудном уровне он вернулся на базу в 40 прогонах из 40, адаптивный агент — в 35. По счёту разницы при этом нет.</a:t>
+              <a:t>Карта вероятностей находит 99,7 процента образцов — больше, чем спираль и подъём по сигналу из условия. Агент-исследователь держит несколько объяснений странности и проверяет их опытом: из 177 выводов о причине неверны 3. На трудном уровне он вернулся на базу в 40 прогонах из 40, адаптивный — в 35.</a:t>
             </a:r>
             <a:endParaRPr lang="en-US" dirty="0"/>
           </a:p>
@@ -5987,7 +5987,7 @@
                   <a:schemeClr val="tx2"/>
                 </a:solidFill>
               </a:rPr>
-              <a:t>288 автоматических проверок, воспроизводимые серии прогонов, история в git. </a:t>
+              <a:t>300 автоматических проверок, воспроизводимые серии прогонов, история в git. </a:t>
             </a:r>
             <a:pPr algn="l" indent="0" marL="0">
               <a:buNone/>
@@ -9449,7 +9449,7 @@
                   <a:schemeClr val="tx2"/>
                 </a:solidFill>
               </a:rPr>
-              <a:t>12 серий на одинаковых сценариях; 0,1 с на прогон</a:t>
+              <a:t>13 серий на одинаковых сценариях; 2,0 с на прогон</a:t>
             </a:r>
             <a:endParaRPr lang="en-US" sz="1300" dirty="0"/>
           </a:p>
@@ -10590,7 +10590,7 @@
                   <a:schemeClr val="bg1"/>
                 </a:solidFill>
               </a:rPr>
-              <a:t>Web</a:t>
+              <a:t>веб</a:t>
             </a:r>
             <a:endParaRPr lang="en-US" sz="1400" dirty="0"/>
           </a:p>
@@ -10794,7 +10794,7 @@
                   <a:schemeClr val="tx2"/>
                 </a:solidFill>
               </a:rPr>
-              <a:t>288 автоматических проверок; запуск одной командой</a:t>
+              <a:t>300 автоматических проверок; запуск одной командой</a:t>
             </a:r>
             <a:endParaRPr lang="en-US" sz="1400" dirty="0"/>
           </a:p>
@@ -11919,7 +11919,7 @@
                   <a:schemeClr val="tx1"/>
                 </a:solidFill>
               </a:rPr>
-              <a:t>288</a:t>
+              <a:t>300</a:t>
             </a:r>
             <a:pPr algn="r" indent="0" marL="0">
               <a:buNone/>
@@ -11944,7 +11944,7 @@
                   <a:schemeClr val="tx1"/>
                 </a:solidFill>
               </a:rPr>
-              <a:t>2 622</a:t>
+              <a:t>3 606</a:t>
             </a:r>
             <a:pPr algn="r" indent="0" marL="0">
               <a:buNone/>
@@ -11955,7 +11955,7 @@
                   <a:schemeClr val="tx2"/>
                 </a:solidFill>
               </a:rPr>
-              <a:t> прогона</a:t>
+              <a:t> прогонов</a:t>
             </a:r>
             <a:endParaRPr lang="en-US" sz="1400" dirty="0"/>
           </a:p>

--- a/presentation/checkpoint2.pptx
+++ b/presentation/checkpoint2.pptx
@@ -117,7 +117,7 @@
   <p:extLst>
     <p:ext uri="{521415D9-36F7-43E2-AB2F-B90AF26B5E84}">
       <p14:sectionLst xmlns:p14="http://schemas.microsoft.com/office/powerpoint/2010/main">
-        <p14:section name="Задача и решение" id="{06e431f8-b54f-916b-38a5-2b00fe66afff}">
+        <p14:section name="Задача и решение" id="{75f694fc-2d3a-0469-33dd-1c002d074126}">
           <p14:sldIdLst>
             <p14:sldId id="256"/>
             <p14:sldId id="257"/>
@@ -127,7 +127,7 @@
             <p14:sldId id="261"/>
           </p14:sldIdLst>
         </p14:section>
-        <p14:section name="Состояние и результаты" id="{6789391b-36d3-85d2-d603-7d831ee918b0}">
+        <p14:section name="Состояние и результаты" id="{351d8a4c-828e-9b8d-d93c-a3d502f7a014}">
           <p14:sldIdLst>
             <p14:sldId id="262"/>
             <p14:sldId id="263"/>
@@ -135,7 +135,7 @@
             <p14:sldId id="265"/>
           </p14:sldIdLst>
         </p14:section>
-        <p14:section name="Как работали" id="{c3f27179-3de9-582b-8683-3bfeb0b29003}">
+        <p14:section name="Как работали" id="{8a18d53a-3b1e-0146-78c0-3e7b1cbaf454}">
           <p14:sldIdLst>
             <p14:sldId id="266"/>
           </p14:sldIdLst>
@@ -2712,7 +2712,7 @@
           <a:p>
             <a:r>
               <a:rPr lang="en-US" dirty="0"/>
-              <a:t>Слева то, что работает и проверено: стенд, навигация, поиск образцов, журнал гипотез, расследования и планировщик на языковой модели — 300 автоматических проверок и 3 606 прогонов. В работе — пульт и показ в Gazebo, роли модели, локальная модель и конструктор исследования. И прямо о нерешённом: адаптация к изменениям среды пока не прибавляет очков, память между прогонами результата не меняет, а правила судьи — наши допущения.</a:t>
+              <a:t>Слева то, что работает и проверено: стенд, навигация, поиск образцов, журнал гипотез, расследования и планировщик на языковой модели — 300 автоматических проверок и 4 246 прогонов. В работе — пульт и показ в Gazebo, роли модели, локальная модель и конструктор исследования. И прямо о нерешённом: адаптация к изменениям среды пока не прибавляет очков, память между прогонами результата не меняет, а правила судьи — наши допущения.</a:t>
             </a:r>
             <a:endParaRPr lang="en-US" dirty="0"/>
           </a:p>
@@ -7763,7 +7763,7 @@
       </p:sp>
       <p:pic>
         <p:nvPicPr>
-          <p:cNvPr id="20" name="frame-1" descr="Кадр прогона: поиск">    </p:cNvPr>
+          <p:cNvPr id="20" name="gazebo-shot" descr="Окно Gazebo: тот же прогон в симуляторе с физикой">    </p:cNvPr>
           <p:cNvPicPr>
             <a:picLocks noChangeAspect="1"/>
           </p:cNvPicPr>
@@ -7777,8 +7777,8 @@
         </p:blipFill>
         <p:spPr>
           <a:xfrm>
-            <a:off x="548640" y="2724912"/>
-            <a:ext cx="2619756" cy="2509726"/>
+            <a:off x="942594" y="2724912"/>
+            <a:ext cx="1831848" cy="2509726"/>
           </a:xfrm>
           <a:prstGeom prst="rect">
             <a:avLst/>
@@ -7787,7 +7787,7 @@
       </p:pic>
       <p:sp>
         <p:nvSpPr>
-          <p:cNvPr id="21" name="frame-1-state"/>
+          <p:cNvPr id="21" name="gazebo-shot-head"/>
           <p:cNvSpPr txBox="1"/>
           <p:nvPr/>
         </p:nvSpPr>
@@ -7815,7 +7815,7 @@
                   <a:schemeClr val="tx1"/>
                 </a:solidFill>
               </a:rPr>
-              <a:t>37 с · заряд 58 · собрано 0 из 7</a:t>
+              <a:t>Окно Gazebo</a:t>
             </a:r>
             <a:endParaRPr lang="en-US" sz="1300" dirty="0"/>
           </a:p>
@@ -7823,7 +7823,7 @@
       </p:sp>
       <p:sp>
         <p:nvSpPr>
-          <p:cNvPr id="22" name="frame-1-quote"/>
+          <p:cNvPr id="22" name="gazebo-shot-caption"/>
           <p:cNvSpPr txBox="1"/>
           <p:nvPr/>
         </p:nvSpPr>
@@ -7851,7 +7851,7 @@
                   <a:schemeClr val="tx2"/>
                 </a:solidFill>
               </a:rPr>
-              <a:t>Журнал: «H1: образец лежит около (−1,5; −1,4)»</a:t>
+              <a:t>мир и робот из официальных пакетов; цветом показана скрытая правда</a:t>
             </a:r>
             <a:endParaRPr lang="en-US" sz="1100" dirty="0"/>
           </a:p>
@@ -8043,7 +8043,7 @@
                   <a:schemeClr val="accent5"/>
                 </a:solidFill>
               </a:rPr>
-              <a:t>Кадры — настоящая миссия в Gazebo на трудном уровне: собрано 5 из 7, робот вернулся на базу. Синее — где агент ждёт образец, жёлтые кольца — где образцы на самом деле, зелёное — собрано, красное — штраф.</a:t>
+              <a:t>Кадр справа — настоящая миссия в Gazebo на трудном уровне: собрано 5 из 7, робот вернулся на базу. Синее — где агент ждёт образец, жёлтые кольца — где образцы на самом деле, зелёное — собрано, красное — штраф.</a:t>
             </a:r>
             <a:endParaRPr lang="en-US" sz="1100" dirty="0"/>
           </a:p>
@@ -9449,7 +9449,7 @@
                   <a:schemeClr val="tx2"/>
                 </a:solidFill>
               </a:rPr>
-              <a:t>13 серий на одинаковых сценариях; 2,0 с на прогон</a:t>
+              <a:t>14 серий на одинаковых сценариях; прогон считается 0,4 с</a:t>
             </a:r>
             <a:endParaRPr lang="en-US" sz="1300" dirty="0"/>
           </a:p>
@@ -11944,7 +11944,7 @@
                   <a:schemeClr val="tx1"/>
                 </a:solidFill>
               </a:rPr>
-              <a:t>3 606</a:t>
+              <a:t>4 246</a:t>
             </a:r>
             <a:pPr algn="r" indent="0" marL="0">
               <a:buNone/>

--- a/presentation/checkpoint2.pptx
+++ b/presentation/checkpoint2.pptx
@@ -117,7 +117,7 @@
   <p:extLst>
     <p:ext uri="{521415D9-36F7-43E2-AB2F-B90AF26B5E84}">
       <p14:sectionLst xmlns:p14="http://schemas.microsoft.com/office/powerpoint/2010/main">
-        <p14:section name="Задача и решение" id="{75f694fc-2d3a-0469-33dd-1c002d074126}">
+        <p14:section name="Задача и решение" id="{192f0d2e-0256-1c03-fb1f-12963209cc11}">
           <p14:sldIdLst>
             <p14:sldId id="256"/>
             <p14:sldId id="257"/>
@@ -127,7 +127,7 @@
             <p14:sldId id="261"/>
           </p14:sldIdLst>
         </p14:section>
-        <p14:section name="Состояние и результаты" id="{351d8a4c-828e-9b8d-d93c-a3d502f7a014}">
+        <p14:section name="Состояние и результаты" id="{c316c06f-5308-2faf-a2a9-af963ef37a1c}">
           <p14:sldIdLst>
             <p14:sldId id="262"/>
             <p14:sldId id="263"/>
@@ -135,7 +135,7 @@
             <p14:sldId id="265"/>
           </p14:sldIdLst>
         </p14:section>
-        <p14:section name="Как работали" id="{8a18d53a-3b1e-0146-78c0-3e7b1cbaf454}">
+        <p14:section name="Как работали" id="{8cf4f364-ee6d-0de5-bb74-7599afbeb63c}">
           <p14:sldIdLst>
             <p14:sldId id="266"/>
           </p14:sldIdLst>
@@ -232,13 +232,13 @@
                 <c:formatCode>General</c:formatCode>
                 <c:ptCount val="3"/>
                 <c:pt idx="0">
-                  <c:v>91.7</c:v>
+                  <c:v>90.8</c:v>
                 </c:pt>
                 <c:pt idx="1">
                   <c:v>76.5</c:v>
                 </c:pt>
                 <c:pt idx="2">
-                  <c:v>61.4</c:v>
+                  <c:v>60.3</c:v>
                 </c:pt>
               </c:numCache>
             </c:numRef>
@@ -321,7 +321,7 @@
                   <c:v>99.5</c:v>
                 </c:pt>
                 <c:pt idx="2">
-                  <c:v>81.8</c:v>
+                  <c:v>81.1</c:v>
                 </c:pt>
               </c:numCache>
             </c:numRef>
@@ -629,7 +629,7 @@
                   <c:v>90.2</c:v>
                 </c:pt>
                 <c:pt idx="2">
-                  <c:v>84.1</c:v>
+                  <c:v>83.7</c:v>
                 </c:pt>
                 <c:pt idx="3">
                   <c:v>75.8</c:v>
@@ -2712,7 +2712,7 @@
           <a:p>
             <a:r>
               <a:rPr lang="en-US" dirty="0"/>
-              <a:t>Слева то, что работает и проверено: стенд, навигация, поиск образцов, журнал гипотез, расследования и планировщик на языковой модели — 300 автоматических проверок и 4 246 прогонов. В работе — пульт и показ в Gazebo, роли модели, локальная модель и конструктор исследования. И прямо о нерешённом: адаптация к изменениям среды пока не прибавляет очков, память между прогонами результата не меняет, а правила судьи — наши допущения.</a:t>
+              <a:t>Слева то, что работает и проверено: стенд, навигация, поиск образцов, журнал гипотез, расследования и планировщик на языковой модели — 300 автоматических проверок и 4 246 прогонов. Сюда же относится показ: пульт строит карту по лидару, принимает цель кликом и запускает автономную миссию в Gazebo; на репетиции собрано пять образцов из пяти. В работе — серия с ролями модели на настоящей модели, локальная модель, карта через SLAM и сравнение маршрутов по риску. И прямо о нерешённом: адаптация к изменениям среды пока не прибавляет очков, память между прогонами результата не меняет, а правила судьи — наши допущения.</a:t>
             </a:r>
             <a:endParaRPr lang="en-US" dirty="0"/>
           </a:p>
@@ -2800,7 +2800,7 @@
           <a:p>
             <a:r>
               <a:rPr lang="en-US" dirty="0"/>
-              <a:t>Главный опыт: два агента на одних и тех же сценариях, которых при отладке не видели. Адаптивный собирает больше, в среднем на 17 процентных пунктов: выиграл в 72 сценариях из 120, проиграл в 3. А на базу оба возвращаются одинаково — эта часть гипотезы не подтвердилась.</a:t>
+              <a:t>Главный опыт: два агента на одних и тех же сценариях, которых при отладке не видели. Адаптивный собирает больше, в среднем на 18 процентных пунктов: выиграл в 72 сценариях из 120, проиграл в 3. А на базу оба возвращаются одинаково — эта часть гипотезы не подтвердилась.</a:t>
             </a:r>
             <a:endParaRPr lang="en-US" dirty="0"/>
           </a:p>
@@ -2888,7 +2888,7 @@
           <a:p>
             <a:r>
               <a:rPr lang="en-US" dirty="0"/>
-              <a:t>Карта вероятностей находит 99,7 процента образцов — больше, чем спираль и подъём по сигналу из условия. Агент-исследователь держит несколько объяснений странности и проверяет их опытом: из 177 выводов о причине неверны 3. На трудном уровне он вернулся на базу в 40 прогонах из 40, адаптивный — в 35.</a:t>
+              <a:t>Карта вероятностей находит 99,7 процента образцов — больше, чем спираль и подъём по сигналу из условия. Агент-исследователь держит несколько объяснений странности и проверяет их опытом: из 192 выводов о причине неверен 1. На трудном уровне он вернулся на базу в 40 прогонах из 40, адаптивный — в 35.</a:t>
             </a:r>
             <a:endParaRPr lang="en-US" dirty="0"/>
           </a:p>
@@ -7771,14 +7771,13 @@
         </p:nvPicPr>
         <p:blipFill>
           <a:blip r:embed="rId1"/>
-          <a:stretch>
-            <a:fillRect/>
-          </a:stretch>
+          <a:srcRect l="0" r="0" t="15038" b="15038"/>
+          <a:stretch/>
         </p:blipFill>
         <p:spPr>
           <a:xfrm>
-            <a:off x="942594" y="2724912"/>
-            <a:ext cx="1831848" cy="2509726"/>
+            <a:off x="548640" y="2724912"/>
+            <a:ext cx="2619756" cy="2509726"/>
           </a:xfrm>
           <a:prstGeom prst="rect">
             <a:avLst/>
@@ -7955,7 +7954,7 @@
       </p:sp>
       <p:pic>
         <p:nvPicPr>
-          <p:cNvPr id="26" name="scenario-shot" descr="Веб-лаборатория: тот же прогон в проигрывателе, 75 с">    </p:cNvPr>
+          <p:cNvPr id="26" name="scenario-shot" descr="Пульт: щелчок по карте задаёт точку, робот едет, карта строится">    </p:cNvPr>
           <p:cNvPicPr>
             <a:picLocks noChangeAspect="1"/>
           </p:cNvPicPr>
@@ -7969,8 +7968,8 @@
         </p:blipFill>
         <p:spPr>
           <a:xfrm>
-            <a:off x="3622479" y="2724912"/>
-            <a:ext cx="4943995" cy="2788920"/>
+            <a:off x="3615436" y="2724912"/>
+            <a:ext cx="4958080" cy="2788920"/>
           </a:xfrm>
           <a:prstGeom prst="rect">
             <a:avLst/>
@@ -8007,7 +8006,7 @@
                   <a:schemeClr val="tx2"/>
                 </a:solidFill>
               </a:rPr>
-              <a:t>Веб-лаборатория: тот же прогон в проигрывателе, 75 с</a:t>
+              <a:t>Пульт: щелчок по карте задаёт точку, робот едет, карта строится</a:t>
             </a:r>
             <a:endParaRPr lang="en-US" sz="1200" dirty="0"/>
           </a:p>
@@ -11787,7 +11786,7 @@
                   <a:schemeClr val="accent5"/>
                 </a:solidFill>
               </a:rPr>
-              <a:t>Основа работает и проверена опытами; показ в Gazebo и роли модели доделываются</a:t>
+              <a:t>Стенд, агент и показ в Gazebo работают и проверены опытами; роли модели и SLAM доделываются</a:t>
             </a:r>
             <a:endParaRPr lang="en-US" sz="1600" dirty="0"/>
           </a:p>
@@ -11847,7 +11846,7 @@
                   <a:schemeClr val="bg1"/>
                 </a:solidFill>
               </a:rPr>
-              <a:t>12</a:t>
+              <a:t>14</a:t>
             </a:r>
             <a:endParaRPr lang="en-US" sz="1500" dirty="0"/>
           </a:p>
@@ -11969,8 +11968,8 @@
         </p:nvSpPr>
         <p:spPr>
           <a:xfrm>
-            <a:off x="777240" y="2560320"/>
-            <a:ext cx="2926080" cy="3520440"/>
+            <a:off x="777240" y="2532888"/>
+            <a:ext cx="2926080" cy="3611880"/>
           </a:xfrm>
           <a:prstGeom prst="rect">
             <a:avLst/>
@@ -11984,240 +11983,276 @@
           <a:p>
             <a:pPr algn="l" marL="342900" indent="-342900">
               <a:spcAft>
-                <a:spcPts val="700"/>
+                <a:spcPts val="500"/>
               </a:spcAft>
               <a:buSzPct val="100000"/>
               <a:buChar char="•"/>
             </a:pPr>
             <a:r>
-              <a:rPr lang="en-US" sz="1400" dirty="0">
+              <a:rPr lang="en-US" sz="1300" dirty="0">
                 <a:solidFill>
                   <a:schemeClr val="tx1"/>
                 </a:solidFill>
               </a:rPr>
               <a:t>Мир и робот в Gazebo из официальных пакетов</a:t>
             </a:r>
-            <a:endParaRPr lang="en-US" sz="1400" dirty="0"/>
+            <a:endParaRPr lang="en-US" sz="1300" dirty="0"/>
           </a:p>
           <a:p>
             <a:pPr algn="l" marL="342900" indent="-342900">
               <a:spcAft>
-                <a:spcPts val="700"/>
+                <a:spcPts val="500"/>
               </a:spcAft>
               <a:buSzPct val="100000"/>
               <a:buChar char="•"/>
             </a:pPr>
             <a:r>
-              <a:rPr lang="en-US" sz="1400" dirty="0">
+              <a:rPr lang="en-US" sz="1300" dirty="0">
                 <a:solidFill>
                   <a:schemeClr val="tx1"/>
                 </a:solidFill>
               </a:rPr>
               <a:t>Судья и генератор сценариев трёх уровней</a:t>
             </a:r>
-            <a:endParaRPr lang="en-US" sz="1400" dirty="0"/>
+            <a:endParaRPr lang="en-US" sz="1300" dirty="0"/>
           </a:p>
           <a:p>
             <a:pPr algn="l" marL="342900" indent="-342900">
               <a:spcAft>
-                <a:spcPts val="700"/>
+                <a:spcPts val="500"/>
               </a:spcAft>
               <a:buSzPct val="100000"/>
               <a:buChar char="•"/>
             </a:pPr>
             <a:r>
-              <a:rPr lang="en-US" sz="1400" dirty="0">
+              <a:rPr lang="en-US" sz="1300" dirty="0">
                 <a:solidFill>
                   <a:schemeClr val="tx1"/>
                 </a:solidFill>
               </a:rPr>
               <a:t>Каналы /did/* из условия задачи</a:t>
             </a:r>
-            <a:endParaRPr lang="en-US" sz="1400" dirty="0"/>
+            <a:endParaRPr lang="en-US" sz="1300" dirty="0"/>
           </a:p>
           <a:p>
             <a:pPr algn="l" marL="342900" indent="-342900">
               <a:spcAft>
-                <a:spcPts val="700"/>
+                <a:spcPts val="500"/>
               </a:spcAft>
               <a:buSzPct val="100000"/>
               <a:buChar char="•"/>
             </a:pPr>
             <a:r>
-              <a:rPr lang="en-US" sz="1400" dirty="0">
+              <a:rPr lang="en-US" sz="1300" dirty="0">
                 <a:solidFill>
                   <a:schemeClr val="tx1"/>
                 </a:solidFill>
               </a:rPr>
               <a:t>Быстрый симулятор с тем же судьёй</a:t>
             </a:r>
-            <a:endParaRPr lang="en-US" sz="1400" dirty="0"/>
+            <a:endParaRPr lang="en-US" sz="1300" dirty="0"/>
           </a:p>
           <a:p>
             <a:pPr algn="l" marL="342900" indent="-342900">
               <a:spcAft>
-                <a:spcPts val="700"/>
+                <a:spcPts val="500"/>
               </a:spcAft>
               <a:buSzPct val="100000"/>
               <a:buChar char="•"/>
             </a:pPr>
             <a:r>
-              <a:rPr lang="en-US" sz="1400" dirty="0">
+              <a:rPr lang="en-US" sz="1300" dirty="0">
                 <a:solidFill>
                   <a:schemeClr val="tx1"/>
                 </a:solidFill>
               </a:rPr>
               <a:t>Навигация по сетке со стоимостями</a:t>
             </a:r>
-            <a:endParaRPr lang="en-US" sz="1400" dirty="0"/>
+            <a:endParaRPr lang="en-US" sz="1300" dirty="0"/>
           </a:p>
           <a:p>
             <a:pPr algn="l" marL="342900" indent="-342900">
               <a:spcAft>
-                <a:spcPts val="700"/>
+                <a:spcPts val="500"/>
               </a:spcAft>
               <a:buSzPct val="100000"/>
               <a:buChar char="•"/>
             </a:pPr>
             <a:r>
-              <a:rPr lang="en-US" sz="1400" dirty="0">
+              <a:rPr lang="en-US" sz="1300" dirty="0">
                 <a:solidFill>
                   <a:schemeClr val="tx1"/>
                 </a:solidFill>
               </a:rPr>
               <a:t>Поправка положения по лидару</a:t>
             </a:r>
-            <a:endParaRPr lang="en-US" sz="1400" dirty="0"/>
-          </a:p>
-        </p:txBody>
-      </p:sp>
-      <p:sp>
-        <p:nvSpPr>
-          <p:cNvPr id="10" name="done-list-2"/>
-          <p:cNvSpPr txBox="1"/>
-          <p:nvPr/>
-        </p:nvSpPr>
-        <p:spPr>
-          <a:xfrm>
-            <a:off x="3840480" y="2560320"/>
-            <a:ext cx="2926080" cy="3520440"/>
-          </a:xfrm>
-          <a:prstGeom prst="rect">
-            <a:avLst/>
-          </a:prstGeom>
-          <a:noFill/>
-          <a:ln/>
-        </p:spPr>
-        <p:txBody>
-          <a:bodyPr wrap="square" lIns="0" tIns="0" rIns="0" bIns="0" rtlCol="0" anchor="t"/>
-          <a:lstStyle/>
+            <a:endParaRPr lang="en-US" sz="1300" dirty="0"/>
+          </a:p>
           <a:p>
             <a:pPr algn="l" marL="342900" indent="-342900">
               <a:spcAft>
-                <a:spcPts val="700"/>
+                <a:spcPts val="500"/>
               </a:spcAft>
               <a:buSzPct val="100000"/>
               <a:buChar char="•"/>
             </a:pPr>
             <a:r>
-              <a:rPr lang="en-US" sz="1400" dirty="0">
+              <a:rPr lang="en-US" sz="1300" dirty="0">
                 <a:solidFill>
                   <a:schemeClr val="tx1"/>
                 </a:solidFill>
               </a:rPr>
-              <a:t>Поиск образцов по карте вероятностей</a:t>
-            </a:r>
-            <a:endParaRPr lang="en-US" sz="1400" dirty="0"/>
-          </a:p>
+              <a:t>Пульт: карта, цель кликом, миссия в Gazebo</a:t>
+            </a:r>
+            <a:endParaRPr lang="en-US" sz="1300" dirty="0"/>
+          </a:p>
+        </p:txBody>
+      </p:sp>
+      <p:sp>
+        <p:nvSpPr>
+          <p:cNvPr id="10" name="done-list-2"/>
+          <p:cNvSpPr txBox="1"/>
+          <p:nvPr/>
+        </p:nvSpPr>
+        <p:spPr>
+          <a:xfrm>
+            <a:off x="3840480" y="2532888"/>
+            <a:ext cx="2926080" cy="3611880"/>
+          </a:xfrm>
+          <a:prstGeom prst="rect">
+            <a:avLst/>
+          </a:prstGeom>
+          <a:noFill/>
+          <a:ln/>
+        </p:spPr>
+        <p:txBody>
+          <a:bodyPr wrap="square" lIns="0" tIns="0" rIns="0" bIns="0" rtlCol="0" anchor="t"/>
+          <a:lstStyle/>
           <a:p>
             <a:pPr algn="l" marL="342900" indent="-342900">
               <a:spcAft>
-                <a:spcPts val="700"/>
+                <a:spcPts val="500"/>
               </a:spcAft>
               <a:buSzPct val="100000"/>
               <a:buChar char="•"/>
             </a:pPr>
             <a:r>
-              <a:rPr lang="en-US" sz="1400" dirty="0">
+              <a:rPr lang="en-US" sz="1300" dirty="0">
                 <a:solidFill>
                   <a:schemeClr val="tx1"/>
                 </a:solidFill>
               </a:rPr>
-              <a:t>Оценка грунта по расходу, возврат по запасу заряда</a:t>
-            </a:r>
-            <a:endParaRPr lang="en-US" sz="1400" dirty="0"/>
+              <a:t>Поиск образцов по карте вероятностей</a:t>
+            </a:r>
+            <a:endParaRPr lang="en-US" sz="1300" dirty="0"/>
           </a:p>
           <a:p>
             <a:pPr algn="l" marL="342900" indent="-342900">
               <a:spcAft>
-                <a:spcPts val="700"/>
+                <a:spcPts val="500"/>
               </a:spcAft>
               <a:buSzPct val="100000"/>
               <a:buChar char="•"/>
             </a:pPr>
             <a:r>
-              <a:rPr lang="en-US" sz="1400" dirty="0">
+              <a:rPr lang="en-US" sz="1300" dirty="0">
                 <a:solidFill>
                   <a:schemeClr val="tx1"/>
                 </a:solidFill>
               </a:rPr>
-              <a:t>Журнал гипотез и расследования с выбором опыта</a:t>
-            </a:r>
-            <a:endParaRPr lang="en-US" sz="1400" dirty="0"/>
+              <a:t>Оценка грунта по расходу, возврат по запасу заряда</a:t>
+            </a:r>
+            <a:endParaRPr lang="en-US" sz="1300" dirty="0"/>
           </a:p>
           <a:p>
             <a:pPr algn="l" marL="342900" indent="-342900">
               <a:spcAft>
-                <a:spcPts val="700"/>
+                <a:spcPts val="500"/>
               </a:spcAft>
               <a:buSzPct val="100000"/>
               <a:buChar char="•"/>
             </a:pPr>
             <a:r>
-              <a:rPr lang="en-US" sz="1400" dirty="0">
+              <a:rPr lang="en-US" sz="1300" dirty="0">
                 <a:solidFill>
                   <a:schemeClr val="tx1"/>
                 </a:solidFill>
               </a:rPr>
-              <a:t>Память между прогонами</a:t>
-            </a:r>
-            <a:endParaRPr lang="en-US" sz="1400" dirty="0"/>
+              <a:t>Журнал гипотез и расследования с выбором опыта</a:t>
+            </a:r>
+            <a:endParaRPr lang="en-US" sz="1300" dirty="0"/>
           </a:p>
           <a:p>
             <a:pPr algn="l" marL="342900" indent="-342900">
               <a:spcAft>
-                <a:spcPts val="700"/>
+                <a:spcPts val="500"/>
               </a:spcAft>
               <a:buSzPct val="100000"/>
               <a:buChar char="•"/>
             </a:pPr>
             <a:r>
-              <a:rPr lang="en-US" sz="1400" dirty="0">
+              <a:rPr lang="en-US" sz="1300" dirty="0">
                 <a:solidFill>
                   <a:schemeClr val="tx1"/>
                 </a:solidFill>
               </a:rPr>
-              <a:t>Планировщик на языковой модели: 97% годных планов с первого раза</a:t>
-            </a:r>
-            <a:endParaRPr lang="en-US" sz="1400" dirty="0"/>
+              <a:t>Память между прогонами</a:t>
+            </a:r>
+            <a:endParaRPr lang="en-US" sz="1300" dirty="0"/>
           </a:p>
           <a:p>
             <a:pPr algn="l" marL="342900" indent="-342900">
               <a:spcAft>
-                <a:spcPts val="700"/>
+                <a:spcPts val="500"/>
               </a:spcAft>
               <a:buSzPct val="100000"/>
               <a:buChar char="•"/>
             </a:pPr>
             <a:r>
-              <a:rPr lang="en-US" sz="1400" dirty="0">
+              <a:rPr lang="en-US" sz="1300" dirty="0">
                 <a:solidFill>
                   <a:schemeClr val="tx1"/>
                 </a:solidFill>
               </a:rPr>
+              <a:t>Планировщик на языковой модели: 97% годных планов с первого раза</a:t>
+            </a:r>
+            <a:endParaRPr lang="en-US" sz="1300" dirty="0"/>
+          </a:p>
+          <a:p>
+            <a:pPr algn="l" marL="342900" indent="-342900">
+              <a:spcAft>
+                <a:spcPts val="500"/>
+              </a:spcAft>
+              <a:buSzPct val="100000"/>
+              <a:buChar char="•"/>
+            </a:pPr>
+            <a:r>
+              <a:rPr lang="en-US" sz="1300" dirty="0">
+                <a:solidFill>
+                  <a:schemeClr val="tx1"/>
+                </a:solidFill>
+              </a:rPr>
               <a:t>Веб-лаборатория и запуск одной командой</a:t>
             </a:r>
-            <a:endParaRPr lang="en-US" sz="1400" dirty="0"/>
+            <a:endParaRPr lang="en-US" sz="1300" dirty="0"/>
+          </a:p>
+          <a:p>
+            <a:pPr algn="l" marL="342900" indent="-342900">
+              <a:spcAft>
+                <a:spcPts val="500"/>
+              </a:spcAft>
+              <a:buSzPct val="100000"/>
+              <a:buChar char="•"/>
+            </a:pPr>
+            <a:r>
+              <a:rPr lang="en-US" sz="1300" dirty="0">
+                <a:solidFill>
+                  <a:schemeClr val="tx1"/>
+                </a:solidFill>
+              </a:rPr>
+              <a:t>Исследование по заданию человека</a:t>
+            </a:r>
+            <a:endParaRPr lang="en-US" sz="1300" dirty="0"/>
           </a:p>
         </p:txBody>
       </p:sp>
@@ -12275,7 +12310,7 @@
                   <a:schemeClr val="bg1"/>
                 </a:solidFill>
               </a:rPr>
-              <a:t>5</a:t>
+              <a:t>4</a:t>
             </a:r>
             <a:endParaRPr lang="en-US" sz="1500" dirty="0"/>
           </a:p>
@@ -12351,7 +12386,7 @@
                   <a:schemeClr val="tx1"/>
                 </a:solidFill>
               </a:rPr>
-              <a:t>Пульт и показ полного сценария в Gazebo</a:t>
+              <a:t>Роли модели «автор» и «критик»: серия на настоящей модели</a:t>
             </a:r>
             <a:endParaRPr lang="en-US" sz="1400" dirty="0"/>
           </a:p>
@@ -12369,7 +12404,7 @@
                   <a:schemeClr val="tx1"/>
                 </a:solidFill>
               </a:rPr>
-              <a:t>Роли модели «автор» и «критик» в расследованиях</a:t>
+              <a:t>Локальная Qwen: счёт пока ниже правила</a:t>
             </a:r>
             <a:endParaRPr lang="en-US" sz="1400" dirty="0"/>
           </a:p>
@@ -12387,7 +12422,7 @@
                   <a:schemeClr val="tx1"/>
                 </a:solidFill>
               </a:rPr>
-              <a:t>Локальная Qwen: счёт пока ниже правила</a:t>
+              <a:t>Построение карты через SLAM (бонус)</a:t>
             </a:r>
             <a:endParaRPr lang="en-US" sz="1400" dirty="0"/>
           </a:p>
@@ -12405,25 +12440,7 @@
                   <a:schemeClr val="tx1"/>
                 </a:solidFill>
               </a:rPr>
-              <a:t>Конструктор исследования</a:t>
-            </a:r>
-            <a:endParaRPr lang="en-US" sz="1400" dirty="0"/>
-          </a:p>
-          <a:p>
-            <a:pPr algn="l" marL="342900" indent="-342900">
-              <a:spcAft>
-                <a:spcPts val="200"/>
-              </a:spcAft>
-              <a:buSzPct val="100000"/>
-              <a:buChar char="•"/>
-            </a:pPr>
-            <a:r>
-              <a:rPr lang="en-US" sz="1400" dirty="0">
-                <a:solidFill>
-                  <a:schemeClr val="tx1"/>
-                </a:solidFill>
-              </a:rPr>
-              <a:t>Построение карты через SLAM (бонус)</a:t>
+              <a:t>Сравнение маршрутов по риску: выигрыша пока нет</a:t>
             </a:r>
             <a:endParaRPr lang="en-US" sz="1400" dirty="0"/>
           </a:p>
@@ -12887,7 +12904,7 @@
                   <a:schemeClr val="tx1"/>
                 </a:solidFill>
               </a:rPr>
-              <a:t>+17 п. п.</a:t>
+              <a:t>+18 п. п.</a:t>
             </a:r>
             <a:endParaRPr lang="en-US" sz="3400" dirty="0"/>
           </a:p>
@@ -13075,7 +13092,7 @@
                   <a:schemeClr val="tx1"/>
                 </a:solidFill>
               </a:rPr>
-              <a:t>98% и 99%</a:t>
+              <a:t>98% и 98%</a:t>
             </a:r>
             <a:endParaRPr lang="en-US" sz="3400" dirty="0"/>
           </a:p>
@@ -13455,7 +13472,7 @@
                   <a:schemeClr val="tx1"/>
                 </a:solidFill>
               </a:rPr>
-              <a:t>3 из 177</a:t>
+              <a:t>1 из 192</a:t>
             </a:r>
             <a:endParaRPr lang="en-US" sz="3400" dirty="0"/>
           </a:p>
@@ -13491,7 +13508,7 @@
                   <a:schemeClr val="tx2"/>
                 </a:solidFill>
               </a:rPr>
-              <a:t>выводов исследователя о причине неверны; ещё 14 верны частично. Найдено 68% настоящих сбоев</a:t>
+              <a:t>выводов исследователя о причине неверны; ещё 12 верны частично. Найдено 72% настоящих сбоев</a:t>
             </a:r>
             <a:endParaRPr lang="en-US" sz="1400" dirty="0"/>
           </a:p>

--- a/presentation/checkpoint2.pptx
+++ b/presentation/checkpoint2.pptx
@@ -117,7 +117,7 @@
   <p:extLst>
     <p:ext uri="{521415D9-36F7-43E2-AB2F-B90AF26B5E84}">
       <p14:sectionLst xmlns:p14="http://schemas.microsoft.com/office/powerpoint/2010/main">
-        <p14:section name="Задача и решение" id="{192f0d2e-0256-1c03-fb1f-12963209cc11}">
+        <p14:section name="Задача и решение" id="{9328f217-6e1b-9232-4130-155418d85f1c}">
           <p14:sldIdLst>
             <p14:sldId id="256"/>
             <p14:sldId id="257"/>
@@ -127,7 +127,7 @@
             <p14:sldId id="261"/>
           </p14:sldIdLst>
         </p14:section>
-        <p14:section name="Состояние и результаты" id="{c316c06f-5308-2faf-a2a9-af963ef37a1c}">
+        <p14:section name="Состояние и результаты" id="{36884520-b75c-1697-4479-fb07df845999}">
           <p14:sldIdLst>
             <p14:sldId id="262"/>
             <p14:sldId id="263"/>
@@ -135,7 +135,7 @@
             <p14:sldId id="265"/>
           </p14:sldIdLst>
         </p14:section>
-        <p14:section name="Как работали" id="{8cf4f364-ee6d-0de5-bb74-7599afbeb63c}">
+        <p14:section name="Как работали" id="{138cadce-5970-46a8-67be-a04e7cc56691}">
           <p14:sldIdLst>
             <p14:sldId id="266"/>
           </p14:sldIdLst>
